--- a/Chap/RazorPages/Presentations/RazorPagesOverview.pptx
+++ b/Chap/RazorPages/Presentations/RazorPagesOverview.pptx
@@ -52,17 +52,21 @@
     <p:sldId id="276" r:id="rId46"/>
     <p:sldId id="277" r:id="rId47"/>
     <p:sldId id="306" r:id="rId48"/>
-    <p:sldId id="307" r:id="rId49"/>
-    <p:sldId id="308" r:id="rId50"/>
-    <p:sldId id="309" r:id="rId51"/>
-    <p:sldId id="311" r:id="rId52"/>
-    <p:sldId id="318" r:id="rId53"/>
-    <p:sldId id="312" r:id="rId54"/>
-    <p:sldId id="316" r:id="rId55"/>
-    <p:sldId id="313" r:id="rId56"/>
-    <p:sldId id="314" r:id="rId57"/>
-    <p:sldId id="315" r:id="rId58"/>
-    <p:sldId id="310" r:id="rId59"/>
+    <p:sldId id="319" r:id="rId49"/>
+    <p:sldId id="320" r:id="rId50"/>
+    <p:sldId id="322" r:id="rId51"/>
+    <p:sldId id="321" r:id="rId52"/>
+    <p:sldId id="323" r:id="rId53"/>
+    <p:sldId id="324" r:id="rId54"/>
+    <p:sldId id="325" r:id="rId55"/>
+    <p:sldId id="326" r:id="rId56"/>
+    <p:sldId id="327" r:id="rId57"/>
+    <p:sldId id="328" r:id="rId58"/>
+    <p:sldId id="329" r:id="rId59"/>
+    <p:sldId id="330" r:id="rId60"/>
+    <p:sldId id="331" r:id="rId61"/>
+    <p:sldId id="332" r:id="rId62"/>
+    <p:sldId id="307" r:id="rId63"/>
   </p:sldIdLst>
   <p:sldSz cx="12192000" cy="6858000"/>
   <p:notesSz cx="6858000" cy="9144000"/>
@@ -169,168 +173,6 @@
 </p:presentation>
 </file>
 
-<file path=ppt/ink/ink1.xml><?xml version="1.0" encoding="utf-8"?>
-<inkml:ink xmlns:inkml="http://www.w3.org/2003/InkML">
-  <inkml:definitions>
-    <inkml:context xml:id="ctx0">
-      <inkml:inkSource xml:id="inkSrc0">
-        <inkml:traceFormat>
-          <inkml:channel name="X" type="integer" min="-2.14748E9" max="2.14748E9" units="cm"/>
-          <inkml:channel name="Y" type="integer" min="-2.14748E9" max="2.14748E9" units="cm"/>
-        </inkml:traceFormat>
-        <inkml:channelProperties>
-          <inkml:channelProperty channel="X" name="resolution" value="1000" units="1/cm"/>
-          <inkml:channelProperty channel="Y" name="resolution" value="1000" units="1/cm"/>
-        </inkml:channelProperties>
-      </inkml:inkSource>
-      <inkml:timestamp xml:id="ts0" timeString="2023-11-08T12:21:57.776"/>
-    </inkml:context>
-    <inkml:brush xml:id="br0">
-      <inkml:brushProperty name="width" value="0.05" units="cm"/>
-      <inkml:brushProperty name="height" value="0.05" units="cm"/>
-      <inkml:brushProperty name="ignorePressure" value="1"/>
-    </inkml:brush>
-  </inkml:definitions>
-  <inkml:trace contextRef="#ctx0" brushRef="#br0">0 1,'1143'0,"-806"25,-244-25,-70 0</inkml:trace>
-</inkml:ink>
-</file>
-
-<file path=ppt/ink/ink2.xml><?xml version="1.0" encoding="utf-8"?>
-<inkml:ink xmlns:inkml="http://www.w3.org/2003/InkML">
-  <inkml:definitions>
-    <inkml:context xml:id="ctx0">
-      <inkml:inkSource xml:id="inkSrc0">
-        <inkml:traceFormat>
-          <inkml:channel name="X" type="integer" min="-2.14748E9" max="2.14748E9" units="cm"/>
-          <inkml:channel name="Y" type="integer" min="-2.14748E9" max="2.14748E9" units="cm"/>
-        </inkml:traceFormat>
-        <inkml:channelProperties>
-          <inkml:channelProperty channel="X" name="resolution" value="1000" units="1/cm"/>
-          <inkml:channelProperty channel="Y" name="resolution" value="1000" units="1/cm"/>
-        </inkml:channelProperties>
-      </inkml:inkSource>
-      <inkml:timestamp xml:id="ts0" timeString="2023-11-08T12:24:26.826"/>
-    </inkml:context>
-    <inkml:brush xml:id="br0">
-      <inkml:brushProperty name="width" value="0.2" units="cm"/>
-      <inkml:brushProperty name="height" value="0.2" units="cm"/>
-      <inkml:brushProperty name="color" value="#E71224"/>
-      <inkml:brushProperty name="ignorePressure" value="1"/>
-    </inkml:brush>
-  </inkml:definitions>
-  <inkml:trace contextRef="#ctx0" brushRef="#br0">0 1,'0'0</inkml:trace>
-</inkml:ink>
-</file>
-
-<file path=ppt/ink/ink3.xml><?xml version="1.0" encoding="utf-8"?>
-<inkml:ink xmlns:inkml="http://www.w3.org/2003/InkML">
-  <inkml:definitions>
-    <inkml:context xml:id="ctx0">
-      <inkml:inkSource xml:id="inkSrc0">
-        <inkml:traceFormat>
-          <inkml:channel name="X" type="integer" min="-2.14748E9" max="2.14748E9" units="cm"/>
-          <inkml:channel name="Y" type="integer" min="-2.14748E9" max="2.14748E9" units="cm"/>
-        </inkml:traceFormat>
-        <inkml:channelProperties>
-          <inkml:channelProperty channel="X" name="resolution" value="1000" units="1/cm"/>
-          <inkml:channelProperty channel="Y" name="resolution" value="1000" units="1/cm"/>
-        </inkml:channelProperties>
-      </inkml:inkSource>
-      <inkml:timestamp xml:id="ts0" timeString="2023-11-08T12:24:35.511"/>
-    </inkml:context>
-    <inkml:brush xml:id="br0">
-      <inkml:brushProperty name="width" value="0.2" units="cm"/>
-      <inkml:brushProperty name="height" value="0.2" units="cm"/>
-      <inkml:brushProperty name="color" value="#E71224"/>
-      <inkml:brushProperty name="ignorePressure" value="1"/>
-    </inkml:brush>
-  </inkml:definitions>
-  <inkml:trace contextRef="#ctx0" brushRef="#br0">0 0,'524'0,"-240"46,-44-26,-182-13,1-2,0-2,55-6,-5 0,322 4,-239 24,14-3,343-19,-328 22,-144-26,190 16,-105-22,-108-1,152-17,162-1,-38 2,16 25,-324-1</inkml:trace>
-</inkml:ink>
-</file>
-
-<file path=ppt/ink/ink4.xml><?xml version="1.0" encoding="utf-8"?>
-<inkml:ink xmlns:inkml="http://www.w3.org/2003/InkML">
-  <inkml:definitions>
-    <inkml:context xml:id="ctx0">
-      <inkml:inkSource xml:id="inkSrc0">
-        <inkml:traceFormat>
-          <inkml:channel name="X" type="integer" min="-2.14748E9" max="2.14748E9" units="cm"/>
-          <inkml:channel name="Y" type="integer" min="-2.14748E9" max="2.14748E9" units="cm"/>
-        </inkml:traceFormat>
-        <inkml:channelProperties>
-          <inkml:channelProperty channel="X" name="resolution" value="1000" units="1/cm"/>
-          <inkml:channelProperty channel="Y" name="resolution" value="1000" units="1/cm"/>
-        </inkml:channelProperties>
-      </inkml:inkSource>
-      <inkml:timestamp xml:id="ts0" timeString="2023-11-08T12:24:54.255"/>
-    </inkml:context>
-    <inkml:brush xml:id="br0">
-      <inkml:brushProperty name="width" value="0.2" units="cm"/>
-      <inkml:brushProperty name="height" value="0.2" units="cm"/>
-      <inkml:brushProperty name="color" value="#E71224"/>
-      <inkml:brushProperty name="ignorePressure" value="1"/>
-    </inkml:brush>
-  </inkml:definitions>
-  <inkml:trace contextRef="#ctx0" brushRef="#br0">76 76,'0'0</inkml:trace>
-  <inkml:trace contextRef="#ctx0" brushRef="#br0" timeOffset="2273.928">1 26,'1'-2,"1"0,-1 0,1 0,0 1,0-1,0 1,0-1,0 1,0 0,0 0,0-1,0 2,1-1,-1 0,0 0,1 1,-1-1,1 1,-1 0,1 0,-1 0,0 0,1 0,1 1,1-2,582-1,2377 2,-2942 0</inkml:trace>
-</inkml:ink>
-</file>
-
-<file path=ppt/ink/ink5.xml><?xml version="1.0" encoding="utf-8"?>
-<inkml:ink xmlns:inkml="http://www.w3.org/2003/InkML">
-  <inkml:definitions>
-    <inkml:context xml:id="ctx0">
-      <inkml:inkSource xml:id="inkSrc0">
-        <inkml:traceFormat>
-          <inkml:channel name="X" type="integer" min="-2.14748E9" max="2.14748E9" units="cm"/>
-          <inkml:channel name="Y" type="integer" min="-2.14748E9" max="2.14748E9" units="cm"/>
-        </inkml:traceFormat>
-        <inkml:channelProperties>
-          <inkml:channelProperty channel="X" name="resolution" value="1000" units="1/cm"/>
-          <inkml:channelProperty channel="Y" name="resolution" value="1000" units="1/cm"/>
-        </inkml:channelProperties>
-      </inkml:inkSource>
-      <inkml:timestamp xml:id="ts0" timeString="2023-11-08T12:25:57.079"/>
-    </inkml:context>
-    <inkml:brush xml:id="br0">
-      <inkml:brushProperty name="width" value="0.2" units="cm"/>
-      <inkml:brushProperty name="height" value="0.2" units="cm"/>
-      <inkml:brushProperty name="color" value="#E71224"/>
-      <inkml:brushProperty name="ignorePressure" value="1"/>
-    </inkml:brush>
-  </inkml:definitions>
-  <inkml:trace contextRef="#ctx0" brushRef="#br0">0 10,'0'-4,"0"-2</inkml:trace>
-</inkml:ink>
-</file>
-
-<file path=ppt/ink/ink6.xml><?xml version="1.0" encoding="utf-8"?>
-<inkml:ink xmlns:inkml="http://www.w3.org/2003/InkML">
-  <inkml:definitions>
-    <inkml:context xml:id="ctx0">
-      <inkml:inkSource xml:id="inkSrc0">
-        <inkml:traceFormat>
-          <inkml:channel name="X" type="integer" min="-2.14748E9" max="2.14748E9" units="cm"/>
-          <inkml:channel name="Y" type="integer" min="-2.14748E9" max="2.14748E9" units="cm"/>
-        </inkml:traceFormat>
-        <inkml:channelProperties>
-          <inkml:channelProperty channel="X" name="resolution" value="1000" units="1/cm"/>
-          <inkml:channelProperty channel="Y" name="resolution" value="1000" units="1/cm"/>
-        </inkml:channelProperties>
-      </inkml:inkSource>
-      <inkml:timestamp xml:id="ts0" timeString="2023-11-08T12:26:01.828"/>
-    </inkml:context>
-    <inkml:brush xml:id="br0">
-      <inkml:brushProperty name="width" value="0.2" units="cm"/>
-      <inkml:brushProperty name="height" value="0.2" units="cm"/>
-      <inkml:brushProperty name="color" value="#E71224"/>
-      <inkml:brushProperty name="ignorePressure" value="1"/>
-    </inkml:brush>
-  </inkml:definitions>
-  <inkml:trace contextRef="#ctx0" brushRef="#br0">1 0,'773'0,"-589"25,-126-24,-38-2,0 1,0 1,0 1,-1 1,1 1,-1 0,1 2,2 1,2 0,1 0,0-2,0-1,0-1,0-1,0-1,1-1,24-4,25 2,691 2,-576-26,60 12,-19 2,-149 14,-61-2</inkml:trace>
-</inkml:ink>
-</file>
-
 <file path=ppt/slideLayouts/slideLayout1.xml><?xml version="1.0" encoding="utf-8"?>
 <p:sldLayout xmlns:a="http://schemas.openxmlformats.org/drawingml/2006/main" xmlns:r="http://schemas.openxmlformats.org/officeDocument/2006/relationships" xmlns:p="http://schemas.openxmlformats.org/presentationml/2006/main" type="title" preserve="1">
   <p:cSld name="Titelslide">
@@ -478,7 +320,7 @@
           <a:p>
             <a:fld id="{87B061CD-0693-4F79-82AD-7B93EDBB9C36}" type="datetimeFigureOut">
               <a:rPr lang="da-DK" smtClean="0"/>
-              <a:t>19-08-2025</a:t>
+              <a:t>16-11-2025</a:t>
             </a:fld>
             <a:endParaRPr lang="da-DK"/>
           </a:p>
@@ -688,7 +530,7 @@
           <a:p>
             <a:fld id="{87B061CD-0693-4F79-82AD-7B93EDBB9C36}" type="datetimeFigureOut">
               <a:rPr lang="da-DK" smtClean="0"/>
-              <a:t>19-08-2025</a:t>
+              <a:t>16-11-2025</a:t>
             </a:fld>
             <a:endParaRPr lang="da-DK"/>
           </a:p>
@@ -908,7 +750,7 @@
           <a:p>
             <a:fld id="{87B061CD-0693-4F79-82AD-7B93EDBB9C36}" type="datetimeFigureOut">
               <a:rPr lang="da-DK" smtClean="0"/>
-              <a:t>19-08-2025</a:t>
+              <a:t>16-11-2025</a:t>
             </a:fld>
             <a:endParaRPr lang="da-DK"/>
           </a:p>
@@ -1118,7 +960,7 @@
           <a:p>
             <a:fld id="{87B061CD-0693-4F79-82AD-7B93EDBB9C36}" type="datetimeFigureOut">
               <a:rPr lang="da-DK" smtClean="0"/>
-              <a:t>19-08-2025</a:t>
+              <a:t>16-11-2025</a:t>
             </a:fld>
             <a:endParaRPr lang="da-DK"/>
           </a:p>
@@ -1405,7 +1247,7 @@
           <a:p>
             <a:fld id="{87B061CD-0693-4F79-82AD-7B93EDBB9C36}" type="datetimeFigureOut">
               <a:rPr lang="da-DK" smtClean="0"/>
-              <a:t>19-08-2025</a:t>
+              <a:t>16-11-2025</a:t>
             </a:fld>
             <a:endParaRPr lang="da-DK"/>
           </a:p>
@@ -1682,7 +1524,7 @@
           <a:p>
             <a:fld id="{87B061CD-0693-4F79-82AD-7B93EDBB9C36}" type="datetimeFigureOut">
               <a:rPr lang="da-DK" smtClean="0"/>
-              <a:t>19-08-2025</a:t>
+              <a:t>16-11-2025</a:t>
             </a:fld>
             <a:endParaRPr lang="da-DK"/>
           </a:p>
@@ -2106,7 +1948,7 @@
           <a:p>
             <a:fld id="{87B061CD-0693-4F79-82AD-7B93EDBB9C36}" type="datetimeFigureOut">
               <a:rPr lang="da-DK" smtClean="0"/>
-              <a:t>19-08-2025</a:t>
+              <a:t>16-11-2025</a:t>
             </a:fld>
             <a:endParaRPr lang="da-DK"/>
           </a:p>
@@ -2259,7 +2101,7 @@
           <a:p>
             <a:fld id="{87B061CD-0693-4F79-82AD-7B93EDBB9C36}" type="datetimeFigureOut">
               <a:rPr lang="da-DK" smtClean="0"/>
-              <a:t>19-08-2025</a:t>
+              <a:t>16-11-2025</a:t>
             </a:fld>
             <a:endParaRPr lang="da-DK"/>
           </a:p>
@@ -2384,7 +2226,7 @@
           <a:p>
             <a:fld id="{87B061CD-0693-4F79-82AD-7B93EDBB9C36}" type="datetimeFigureOut">
               <a:rPr lang="da-DK" smtClean="0"/>
-              <a:t>19-08-2025</a:t>
+              <a:t>16-11-2025</a:t>
             </a:fld>
             <a:endParaRPr lang="da-DK"/>
           </a:p>
@@ -2707,7 +2549,7 @@
           <a:p>
             <a:fld id="{87B061CD-0693-4F79-82AD-7B93EDBB9C36}" type="datetimeFigureOut">
               <a:rPr lang="da-DK" smtClean="0"/>
-              <a:t>19-08-2025</a:t>
+              <a:t>16-11-2025</a:t>
             </a:fld>
             <a:endParaRPr lang="da-DK"/>
           </a:p>
@@ -3007,7 +2849,7 @@
           <a:p>
             <a:fld id="{87B061CD-0693-4F79-82AD-7B93EDBB9C36}" type="datetimeFigureOut">
               <a:rPr lang="da-DK" smtClean="0"/>
-              <a:t>19-08-2025</a:t>
+              <a:t>16-11-2025</a:t>
             </a:fld>
             <a:endParaRPr lang="da-DK"/>
           </a:p>
@@ -3260,7 +3102,7 @@
           <a:p>
             <a:fld id="{87B061CD-0693-4F79-82AD-7B93EDBB9C36}" type="datetimeFigureOut">
               <a:rPr lang="da-DK" smtClean="0"/>
-              <a:t>19-08-2025</a:t>
+              <a:t>16-11-2025</a:t>
             </a:fld>
             <a:endParaRPr lang="da-DK"/>
           </a:p>
@@ -5722,7 +5564,7 @@
         <p:spPr>
           <a:xfrm>
             <a:off x="113809" y="592594"/>
-            <a:ext cx="1974580" cy="584775"/>
+            <a:ext cx="2767489" cy="584775"/>
           </a:xfrm>
           <a:prstGeom prst="rect">
             <a:avLst/>
@@ -5741,7 +5583,15 @@
             </a:r>
             <a:r>
               <a:rPr lang="da-DK" sz="3200" b="1" dirty="0" err="1"/>
-              <a:t>Layout.cs</a:t>
+              <a:t>Layout</a:t>
+            </a:r>
+            <a:r>
+              <a:rPr lang="da-DK" sz="3200" b="1" err="1"/>
+              <a:t>.</a:t>
+            </a:r>
+            <a:r>
+              <a:rPr lang="da-DK" sz="3200" b="1"/>
+              <a:t>cshtml</a:t>
             </a:r>
             <a:endParaRPr lang="da-DK" sz="3200" b="1" dirty="0"/>
           </a:p>
@@ -18028,7 +17878,7 @@
           <p:cNvPr id="2" name="Titel 1">
             <a:extLst>
               <a:ext uri="{FF2B5EF4-FFF2-40B4-BE49-F238E27FC236}">
-                <a16:creationId xmlns:a16="http://schemas.microsoft.com/office/drawing/2014/main" id="{DAF692E9-FDEE-4050-89C2-24BA0EC135B6}"/>
+                <a16:creationId xmlns:a16="http://schemas.microsoft.com/office/drawing/2014/main" id="{E7127DB6-3E97-44FB-BC0D-1D55ABD933E2}"/>
               </a:ext>
             </a:extLst>
           </p:cNvPr>
@@ -18045,8 +17895,8 @@
           <a:lstStyle/>
           <a:p>
             <a:r>
-              <a:rPr lang="da-DK" dirty="0"/>
-              <a:t>Web App with Domain Class</a:t>
+              <a:rPr lang="da-DK"/>
+              <a:t>Web App with Domain class</a:t>
             </a:r>
           </a:p>
         </p:txBody>
@@ -18056,7 +17906,7 @@
           <p:cNvPr id="3" name="Pladsholder til indhold 2">
             <a:extLst>
               <a:ext uri="{FF2B5EF4-FFF2-40B4-BE49-F238E27FC236}">
-                <a16:creationId xmlns:a16="http://schemas.microsoft.com/office/drawing/2014/main" id="{155D4275-2991-432A-ACBA-90FA8552B3BE}"/>
+                <a16:creationId xmlns:a16="http://schemas.microsoft.com/office/drawing/2014/main" id="{DD8807CE-E4D1-4E30-AABA-DB8BAAF66FD6}"/>
               </a:ext>
             </a:extLst>
           </p:cNvPr>
@@ -18072,271 +17922,47 @@
           <a:bodyPr/>
           <a:lstStyle/>
           <a:p>
-            <a:r>
-              <a:rPr lang="da-DK" dirty="0" err="1"/>
-              <a:t>Recommendations</a:t>
-            </a:r>
-            <a:endParaRPr lang="da-DK" dirty="0"/>
-          </a:p>
-          <a:p>
-            <a:pPr lvl="1"/>
-            <a:r>
-              <a:rPr lang="da-DK" dirty="0" err="1"/>
-              <a:t>Add</a:t>
-            </a:r>
-            <a:r>
-              <a:rPr lang="da-DK" dirty="0"/>
-              <a:t> top-</a:t>
-            </a:r>
-            <a:r>
-              <a:rPr lang="da-DK" dirty="0" err="1"/>
-              <a:t>level</a:t>
-            </a:r>
-            <a:r>
-              <a:rPr lang="da-DK" dirty="0"/>
-              <a:t> folder </a:t>
-            </a:r>
-            <a:r>
-              <a:rPr lang="da-DK" b="1" dirty="0"/>
+            <a:pPr marL="514350" indent="-514350">
+              <a:buFont typeface="+mj-lt"/>
+              <a:buAutoNum type="arabicPeriod"/>
+            </a:pPr>
+            <a:r>
+              <a:rPr lang="da-DK"/>
+              <a:t>Create a top-level folder named </a:t>
+            </a:r>
+            <a:r>
+              <a:rPr lang="da-DK" b="1"/>
               <a:t>Models</a:t>
             </a:r>
             <a:r>
-              <a:rPr lang="da-DK" dirty="0"/>
-              <a:t> to </a:t>
-            </a:r>
-            <a:r>
-              <a:rPr lang="da-DK" dirty="0" err="1"/>
-              <a:t>project</a:t>
-            </a:r>
-            <a:endParaRPr lang="da-DK" dirty="0"/>
-          </a:p>
-          <a:p>
-            <a:pPr lvl="1"/>
-            <a:r>
-              <a:rPr lang="da-DK" dirty="0" err="1"/>
-              <a:t>Add</a:t>
-            </a:r>
-            <a:r>
-              <a:rPr lang="da-DK" dirty="0"/>
-              <a:t> domain class definitions to this folder</a:t>
-            </a:r>
-          </a:p>
-          <a:p>
-            <a:pPr lvl="1"/>
-            <a:r>
-              <a:rPr lang="da-DK" b="1" dirty="0">
-                <a:solidFill>
-                  <a:srgbClr val="FF0000"/>
-                </a:solidFill>
-              </a:rPr>
-              <a:t>NB</a:t>
-            </a:r>
-            <a:r>
-              <a:rPr lang="da-DK" dirty="0"/>
-              <a:t>: All domain </a:t>
-            </a:r>
-            <a:r>
-              <a:rPr lang="da-DK" dirty="0" err="1"/>
-              <a:t>classes</a:t>
-            </a:r>
-            <a:r>
-              <a:rPr lang="da-DK" dirty="0"/>
-              <a:t> </a:t>
-            </a:r>
-            <a:r>
-              <a:rPr lang="da-DK" u="sng" dirty="0"/>
-              <a:t>must</a:t>
-            </a:r>
-            <a:r>
-              <a:rPr lang="da-DK" dirty="0"/>
-              <a:t> have a default constructor (i.e. no parameters)</a:t>
-            </a:r>
-          </a:p>
-          <a:p>
-            <a:pPr lvl="1"/>
-            <a:r>
-              <a:rPr lang="da-DK" dirty="0"/>
-              <a:t>Under the </a:t>
-            </a:r>
-            <a:r>
-              <a:rPr lang="da-DK" b="1" dirty="0"/>
-              <a:t>Pages</a:t>
-            </a:r>
-            <a:r>
-              <a:rPr lang="da-DK" dirty="0"/>
-              <a:t> folder, </a:t>
-            </a:r>
-            <a:r>
-              <a:rPr lang="da-DK" dirty="0" err="1"/>
-              <a:t>add</a:t>
-            </a:r>
-            <a:r>
-              <a:rPr lang="da-DK" dirty="0"/>
-              <a:t> </a:t>
-            </a:r>
-            <a:r>
-              <a:rPr lang="da-DK" dirty="0" err="1"/>
-              <a:t>one</a:t>
-            </a:r>
-            <a:r>
-              <a:rPr lang="da-DK" dirty="0"/>
-              <a:t> subfolder for </a:t>
-            </a:r>
-            <a:r>
-              <a:rPr lang="da-DK" dirty="0" err="1"/>
-              <a:t>each</a:t>
-            </a:r>
-            <a:r>
-              <a:rPr lang="da-DK" dirty="0"/>
-              <a:t> domain class</a:t>
-            </a:r>
-          </a:p>
-          <a:p>
-            <a:pPr lvl="1"/>
-            <a:r>
-              <a:rPr lang="da-DK" dirty="0"/>
-              <a:t>Give </a:t>
-            </a:r>
-            <a:r>
-              <a:rPr lang="da-DK" dirty="0" err="1"/>
-              <a:t>each</a:t>
-            </a:r>
-            <a:r>
-              <a:rPr lang="da-DK" dirty="0"/>
-              <a:t> subfolder the same </a:t>
-            </a:r>
-            <a:r>
-              <a:rPr lang="da-DK" dirty="0" err="1"/>
-              <a:t>name</a:t>
-            </a:r>
-            <a:r>
-              <a:rPr lang="da-DK" dirty="0"/>
-              <a:t> as the domain class</a:t>
-            </a:r>
-          </a:p>
-          <a:p>
-            <a:pPr lvl="1"/>
-            <a:r>
-              <a:rPr lang="da-DK" dirty="0" err="1"/>
-              <a:t>Add</a:t>
-            </a:r>
-            <a:r>
-              <a:rPr lang="da-DK" dirty="0"/>
-              <a:t> all Pages </a:t>
-            </a:r>
-            <a:r>
-              <a:rPr lang="da-DK" dirty="0" err="1"/>
-              <a:t>relating</a:t>
-            </a:r>
-            <a:r>
-              <a:rPr lang="da-DK" dirty="0"/>
-              <a:t> to this domain class to this subfolder</a:t>
-            </a:r>
-          </a:p>
-          <a:p>
-            <a:pPr lvl="1"/>
-            <a:r>
-              <a:rPr lang="da-DK" dirty="0" err="1"/>
-              <a:t>Add</a:t>
-            </a:r>
-            <a:r>
-              <a:rPr lang="da-DK" dirty="0"/>
-              <a:t> top-</a:t>
-            </a:r>
-            <a:r>
-              <a:rPr lang="da-DK" dirty="0" err="1"/>
-              <a:t>level</a:t>
-            </a:r>
-            <a:r>
-              <a:rPr lang="da-DK" dirty="0"/>
-              <a:t> folder </a:t>
-            </a:r>
-            <a:r>
-              <a:rPr lang="da-DK" b="1" dirty="0"/>
-              <a:t>Services</a:t>
-            </a:r>
-            <a:r>
-              <a:rPr lang="da-DK" dirty="0"/>
-              <a:t> to </a:t>
-            </a:r>
-            <a:r>
-              <a:rPr lang="da-DK" dirty="0" err="1"/>
-              <a:t>project</a:t>
-            </a:r>
-            <a:endParaRPr lang="da-DK" dirty="0"/>
-          </a:p>
-          <a:p>
-            <a:pPr lvl="1"/>
-            <a:r>
-              <a:rPr lang="da-DK" dirty="0" err="1"/>
-              <a:t>Add</a:t>
-            </a:r>
-            <a:r>
-              <a:rPr lang="da-DK" dirty="0"/>
-              <a:t> all service interfaces/</a:t>
-            </a:r>
-            <a:r>
-              <a:rPr lang="da-DK" dirty="0" err="1"/>
-              <a:t>classes</a:t>
-            </a:r>
-            <a:r>
-              <a:rPr lang="da-DK" dirty="0"/>
-              <a:t> to this folder (</a:t>
-            </a:r>
-            <a:r>
-              <a:rPr lang="da-DK" dirty="0" err="1"/>
-              <a:t>add</a:t>
-            </a:r>
-            <a:r>
-              <a:rPr lang="da-DK" dirty="0"/>
-              <a:t> subfolders </a:t>
-            </a:r>
-            <a:r>
-              <a:rPr lang="da-DK" dirty="0" err="1"/>
-              <a:t>if</a:t>
-            </a:r>
-            <a:r>
-              <a:rPr lang="da-DK" dirty="0"/>
-              <a:t> </a:t>
-            </a:r>
-            <a:r>
-              <a:rPr lang="da-DK" dirty="0" err="1"/>
-              <a:t>needed</a:t>
-            </a:r>
-            <a:r>
-              <a:rPr lang="da-DK" dirty="0"/>
-              <a:t>)</a:t>
-            </a:r>
-          </a:p>
-          <a:p>
-            <a:pPr lvl="1"/>
-            <a:r>
-              <a:rPr lang="da-DK" b="1" dirty="0">
-                <a:solidFill>
-                  <a:srgbClr val="FF0000"/>
-                </a:solidFill>
-              </a:rPr>
-              <a:t>NB</a:t>
-            </a:r>
-            <a:r>
-              <a:rPr lang="da-DK" dirty="0"/>
-              <a:t>: Be </a:t>
-            </a:r>
-            <a:r>
-              <a:rPr lang="da-DK" dirty="0" err="1"/>
-              <a:t>aware</a:t>
-            </a:r>
-            <a:r>
-              <a:rPr lang="da-DK" dirty="0"/>
-              <a:t> of </a:t>
-            </a:r>
-            <a:r>
-              <a:rPr lang="da-DK" b="1" dirty="0" err="1"/>
-              <a:t>namespaces</a:t>
-            </a:r>
-            <a:r>
-              <a:rPr lang="da-DK" dirty="0"/>
-              <a:t>!</a:t>
+              <a:rPr lang="da-DK"/>
+              <a:t>.</a:t>
+            </a:r>
+          </a:p>
+          <a:p>
+            <a:pPr marL="514350" indent="-514350">
+              <a:buFont typeface="+mj-lt"/>
+              <a:buAutoNum type="arabicPeriod"/>
+            </a:pPr>
+            <a:r>
+              <a:rPr lang="da-DK"/>
+              <a:t>In the </a:t>
+            </a:r>
+            <a:r>
+              <a:rPr lang="da-DK" b="1"/>
+              <a:t>Models</a:t>
+            </a:r>
+            <a:r>
+              <a:rPr lang="da-DK"/>
+              <a:t> folder, add a class </a:t>
+            </a:r>
+            <a:r>
+              <a:rPr lang="da-DK" b="1"/>
+              <a:t>Movie</a:t>
+            </a:r>
+            <a:r>
+              <a:rPr lang="da-DK"/>
+              <a:t>.</a:t>
             </a:r>
           </a:p>
         </p:txBody>
@@ -18344,7 +17970,7 @@
     </p:spTree>
     <p:extLst>
       <p:ext uri="{BB962C8B-B14F-4D97-AF65-F5344CB8AC3E}">
-        <p14:creationId xmlns:p14="http://schemas.microsoft.com/office/powerpoint/2010/main" val="651855365"/>
+        <p14:creationId xmlns:p14="http://schemas.microsoft.com/office/powerpoint/2010/main" val="2305724327"/>
       </p:ext>
     </p:extLst>
   </p:cSld>
@@ -18383,12 +18009,42 @@
           <a:chExt cx="0" cy="0"/>
         </a:xfrm>
       </p:grpSpPr>
+      <p:pic>
+        <p:nvPicPr>
+          <p:cNvPr id="4" name="Billede 3">
+            <a:extLst>
+              <a:ext uri="{FF2B5EF4-FFF2-40B4-BE49-F238E27FC236}">
+                <a16:creationId xmlns:a16="http://schemas.microsoft.com/office/drawing/2014/main" id="{5E505AA0-53D4-47EE-BAE4-75C01B822CA8}"/>
+              </a:ext>
+            </a:extLst>
+          </p:cNvPr>
+          <p:cNvPicPr>
+            <a:picLocks noChangeAspect="1"/>
+          </p:cNvPicPr>
+          <p:nvPr/>
+        </p:nvPicPr>
+        <p:blipFill>
+          <a:blip r:embed="rId2"/>
+          <a:stretch>
+            <a:fillRect/>
+          </a:stretch>
+        </p:blipFill>
+        <p:spPr>
+          <a:xfrm>
+            <a:off x="2573867" y="837877"/>
+            <a:ext cx="7416799" cy="5456308"/>
+          </a:xfrm>
+          <a:prstGeom prst="rect">
+            <a:avLst/>
+          </a:prstGeom>
+        </p:spPr>
+      </p:pic>
       <p:sp>
         <p:nvSpPr>
-          <p:cNvPr id="4" name="Rektangel 3">
+          <p:cNvPr id="5" name="Rektangel 4">
             <a:extLst>
               <a:ext uri="{FF2B5EF4-FFF2-40B4-BE49-F238E27FC236}">
-                <a16:creationId xmlns:a16="http://schemas.microsoft.com/office/drawing/2014/main" id="{89792108-48A8-AAC1-ADFE-D83915D1ED67}"/>
+                <a16:creationId xmlns:a16="http://schemas.microsoft.com/office/drawing/2014/main" id="{3CA2EE8C-9DC1-4B74-A715-37D041528463}"/>
               </a:ext>
             </a:extLst>
           </p:cNvPr>
@@ -18397,15 +18053,18 @@
         </p:nvSpPr>
         <p:spPr>
           <a:xfrm>
-            <a:off x="2291887" y="592594"/>
-            <a:ext cx="9604278" cy="5592361"/>
+            <a:off x="2819400" y="3115733"/>
+            <a:ext cx="3124200" cy="956734"/>
           </a:xfrm>
           <a:prstGeom prst="rect">
             <a:avLst/>
           </a:prstGeom>
-          <a:solidFill>
-            <a:srgbClr val="00B050"/>
-          </a:solidFill>
+          <a:noFill/>
+          <a:ln w="38100">
+            <a:solidFill>
+              <a:srgbClr val="FF0000"/>
+            </a:solidFill>
+          </a:ln>
         </p:spPr>
         <p:style>
           <a:lnRef idx="2">
@@ -18424,469 +18083,18 @@
           </a:fontRef>
         </p:style>
         <p:txBody>
-          <a:bodyPr rtlCol="0" anchor="t"/>
+          <a:bodyPr rtlCol="0" anchor="ctr"/>
           <a:lstStyle/>
           <a:p>
-            <a:r>
-              <a:rPr lang="da-DK" b="1" dirty="0">
-                <a:latin typeface="Cascadia Mono" panose="020B0609020000020004" pitchFamily="49" charset="0"/>
-                <a:cs typeface="Cascadia Mono" panose="020B0609020000020004" pitchFamily="49" charset="0"/>
-              </a:rPr>
-              <a:t> public class </a:t>
-            </a:r>
-            <a:r>
-              <a:rPr lang="da-DK" b="1" dirty="0">
-                <a:solidFill>
-                  <a:srgbClr val="FFFF00"/>
-                </a:solidFill>
-                <a:latin typeface="Cascadia Mono" panose="020B0609020000020004" pitchFamily="49" charset="0"/>
-                <a:cs typeface="Cascadia Mono" panose="020B0609020000020004" pitchFamily="49" charset="0"/>
-              </a:rPr>
-              <a:t>Movie</a:t>
-            </a:r>
-          </a:p>
-          <a:p>
-            <a:r>
-              <a:rPr lang="da-DK" b="1" dirty="0">
-                <a:latin typeface="Cascadia Mono" panose="020B0609020000020004" pitchFamily="49" charset="0"/>
-                <a:cs typeface="Cascadia Mono" panose="020B0609020000020004" pitchFamily="49" charset="0"/>
-              </a:rPr>
-              <a:t> {</a:t>
-            </a:r>
-          </a:p>
-          <a:p>
-            <a:r>
-              <a:rPr lang="en-US" b="1" dirty="0">
-                <a:latin typeface="Cascadia Mono" panose="020B0609020000020004" pitchFamily="49" charset="0"/>
-                <a:cs typeface="Cascadia Mono" panose="020B0609020000020004" pitchFamily="49" charset="0"/>
-              </a:rPr>
-              <a:t>     public int </a:t>
-            </a:r>
-            <a:r>
-              <a:rPr lang="en-US" b="1" dirty="0">
-                <a:solidFill>
-                  <a:srgbClr val="FFFF00"/>
-                </a:solidFill>
-                <a:latin typeface="Cascadia Mono" panose="020B0609020000020004" pitchFamily="49" charset="0"/>
-                <a:cs typeface="Cascadia Mono" panose="020B0609020000020004" pitchFamily="49" charset="0"/>
-              </a:rPr>
-              <a:t>Id</a:t>
-            </a:r>
-            <a:r>
-              <a:rPr lang="en-US" b="1" dirty="0">
-                <a:latin typeface="Cascadia Mono" panose="020B0609020000020004" pitchFamily="49" charset="0"/>
-                <a:cs typeface="Cascadia Mono" panose="020B0609020000020004" pitchFamily="49" charset="0"/>
-              </a:rPr>
-              <a:t> { get; set; }</a:t>
-            </a:r>
-          </a:p>
-          <a:p>
-            <a:r>
-              <a:rPr lang="en-US" b="1" dirty="0">
-                <a:latin typeface="Cascadia Mono" panose="020B0609020000020004" pitchFamily="49" charset="0"/>
-                <a:cs typeface="Cascadia Mono" panose="020B0609020000020004" pitchFamily="49" charset="0"/>
-              </a:rPr>
-              <a:t>     public string </a:t>
-            </a:r>
-            <a:r>
-              <a:rPr lang="en-US" b="1" dirty="0">
-                <a:solidFill>
-                  <a:srgbClr val="FFFF00"/>
-                </a:solidFill>
-                <a:latin typeface="Cascadia Mono" panose="020B0609020000020004" pitchFamily="49" charset="0"/>
-                <a:cs typeface="Cascadia Mono" panose="020B0609020000020004" pitchFamily="49" charset="0"/>
-              </a:rPr>
-              <a:t>Title</a:t>
-            </a:r>
-            <a:r>
-              <a:rPr lang="en-US" b="1" dirty="0">
-                <a:latin typeface="Cascadia Mono" panose="020B0609020000020004" pitchFamily="49" charset="0"/>
-                <a:cs typeface="Cascadia Mono" panose="020B0609020000020004" pitchFamily="49" charset="0"/>
-              </a:rPr>
-              <a:t> { get; set; }</a:t>
-            </a:r>
-          </a:p>
-          <a:p>
-            <a:r>
-              <a:rPr lang="en-US" b="1" dirty="0">
-                <a:latin typeface="Cascadia Mono" panose="020B0609020000020004" pitchFamily="49" charset="0"/>
-                <a:cs typeface="Cascadia Mono" panose="020B0609020000020004" pitchFamily="49" charset="0"/>
-              </a:rPr>
-              <a:t>     public int </a:t>
-            </a:r>
-            <a:r>
-              <a:rPr lang="en-US" b="1" dirty="0">
-                <a:solidFill>
-                  <a:srgbClr val="FFFF00"/>
-                </a:solidFill>
-                <a:latin typeface="Cascadia Mono" panose="020B0609020000020004" pitchFamily="49" charset="0"/>
-                <a:cs typeface="Cascadia Mono" panose="020B0609020000020004" pitchFamily="49" charset="0"/>
-              </a:rPr>
-              <a:t>Length</a:t>
-            </a:r>
-            <a:r>
-              <a:rPr lang="en-US" b="1" dirty="0">
-                <a:latin typeface="Cascadia Mono" panose="020B0609020000020004" pitchFamily="49" charset="0"/>
-                <a:cs typeface="Cascadia Mono" panose="020B0609020000020004" pitchFamily="49" charset="0"/>
-              </a:rPr>
-              <a:t> { get; set; }</a:t>
-            </a:r>
-          </a:p>
-          <a:p>
-            <a:r>
-              <a:rPr lang="en-US" b="1" dirty="0">
-                <a:latin typeface="Cascadia Mono" panose="020B0609020000020004" pitchFamily="49" charset="0"/>
-                <a:cs typeface="Cascadia Mono" panose="020B0609020000020004" pitchFamily="49" charset="0"/>
-              </a:rPr>
-              <a:t>     public </a:t>
-            </a:r>
-            <a:r>
-              <a:rPr lang="en-US" b="1" dirty="0" err="1">
-                <a:latin typeface="Cascadia Mono" panose="020B0609020000020004" pitchFamily="49" charset="0"/>
-                <a:cs typeface="Cascadia Mono" panose="020B0609020000020004" pitchFamily="49" charset="0"/>
-              </a:rPr>
-              <a:t>DateTime</a:t>
-            </a:r>
-            <a:r>
-              <a:rPr lang="en-US" b="1" dirty="0">
-                <a:latin typeface="Cascadia Mono" panose="020B0609020000020004" pitchFamily="49" charset="0"/>
-                <a:cs typeface="Cascadia Mono" panose="020B0609020000020004" pitchFamily="49" charset="0"/>
-              </a:rPr>
-              <a:t> </a:t>
-            </a:r>
-            <a:r>
-              <a:rPr lang="en-US" b="1" dirty="0" err="1">
-                <a:solidFill>
-                  <a:srgbClr val="FFFF00"/>
-                </a:solidFill>
-                <a:latin typeface="Cascadia Mono" panose="020B0609020000020004" pitchFamily="49" charset="0"/>
-                <a:cs typeface="Cascadia Mono" panose="020B0609020000020004" pitchFamily="49" charset="0"/>
-              </a:rPr>
-              <a:t>ReleaseDate</a:t>
-            </a:r>
-            <a:r>
-              <a:rPr lang="en-US" b="1" dirty="0">
-                <a:latin typeface="Cascadia Mono" panose="020B0609020000020004" pitchFamily="49" charset="0"/>
-                <a:cs typeface="Cascadia Mono" panose="020B0609020000020004" pitchFamily="49" charset="0"/>
-              </a:rPr>
-              <a:t> { get; set; }</a:t>
-            </a:r>
-          </a:p>
-          <a:p>
-            <a:endParaRPr lang="da-DK" b="1" dirty="0">
-              <a:latin typeface="Cascadia Mono" panose="020B0609020000020004" pitchFamily="49" charset="0"/>
-              <a:cs typeface="Cascadia Mono" panose="020B0609020000020004" pitchFamily="49" charset="0"/>
-            </a:endParaRPr>
-          </a:p>
-          <a:p>
-            <a:r>
-              <a:rPr lang="da-DK" b="1" dirty="0">
-                <a:latin typeface="Cascadia Mono" panose="020B0609020000020004" pitchFamily="49" charset="0"/>
-                <a:cs typeface="Cascadia Mono" panose="020B0609020000020004" pitchFamily="49" charset="0"/>
-              </a:rPr>
-              <a:t>     public </a:t>
-            </a:r>
-            <a:r>
-              <a:rPr lang="da-DK" b="1" dirty="0">
-                <a:solidFill>
-                  <a:srgbClr val="FFFF00"/>
-                </a:solidFill>
-                <a:latin typeface="Cascadia Mono" panose="020B0609020000020004" pitchFamily="49" charset="0"/>
-                <a:cs typeface="Cascadia Mono" panose="020B0609020000020004" pitchFamily="49" charset="0"/>
-              </a:rPr>
-              <a:t>Movie</a:t>
-            </a:r>
-            <a:r>
-              <a:rPr lang="da-DK" b="1" dirty="0">
-                <a:latin typeface="Cascadia Mono" panose="020B0609020000020004" pitchFamily="49" charset="0"/>
-                <a:cs typeface="Cascadia Mono" panose="020B0609020000020004" pitchFamily="49" charset="0"/>
-              </a:rPr>
-              <a:t>() { }</a:t>
-            </a:r>
-          </a:p>
-          <a:p>
-            <a:endParaRPr lang="da-DK" b="1" dirty="0">
-              <a:latin typeface="Cascadia Mono" panose="020B0609020000020004" pitchFamily="49" charset="0"/>
-              <a:cs typeface="Cascadia Mono" panose="020B0609020000020004" pitchFamily="49" charset="0"/>
-            </a:endParaRPr>
-          </a:p>
-          <a:p>
-            <a:r>
-              <a:rPr lang="en-US" b="1" dirty="0">
-                <a:latin typeface="Cascadia Mono" panose="020B0609020000020004" pitchFamily="49" charset="0"/>
-                <a:cs typeface="Cascadia Mono" panose="020B0609020000020004" pitchFamily="49" charset="0"/>
-              </a:rPr>
-              <a:t>     public </a:t>
-            </a:r>
-            <a:r>
-              <a:rPr lang="da-DK" b="1" dirty="0">
-                <a:solidFill>
-                  <a:srgbClr val="FFFF00"/>
-                </a:solidFill>
-                <a:latin typeface="Cascadia Mono" panose="020B0609020000020004" pitchFamily="49" charset="0"/>
-                <a:cs typeface="Cascadia Mono" panose="020B0609020000020004" pitchFamily="49" charset="0"/>
-              </a:rPr>
-              <a:t>Movie</a:t>
-            </a:r>
-            <a:r>
-              <a:rPr lang="en-US" b="1" dirty="0">
-                <a:latin typeface="Cascadia Mono" panose="020B0609020000020004" pitchFamily="49" charset="0"/>
-                <a:cs typeface="Cascadia Mono" panose="020B0609020000020004" pitchFamily="49" charset="0"/>
-              </a:rPr>
-              <a:t>(string title, int length, </a:t>
-            </a:r>
-            <a:r>
-              <a:rPr lang="en-US" b="1" dirty="0" err="1">
-                <a:latin typeface="Cascadia Mono" panose="020B0609020000020004" pitchFamily="49" charset="0"/>
-                <a:cs typeface="Cascadia Mono" panose="020B0609020000020004" pitchFamily="49" charset="0"/>
-              </a:rPr>
-              <a:t>DateTime</a:t>
-            </a:r>
-            <a:r>
-              <a:rPr lang="en-US" b="1" dirty="0">
-                <a:latin typeface="Cascadia Mono" panose="020B0609020000020004" pitchFamily="49" charset="0"/>
-                <a:cs typeface="Cascadia Mono" panose="020B0609020000020004" pitchFamily="49" charset="0"/>
-              </a:rPr>
-              <a:t> </a:t>
-            </a:r>
-            <a:r>
-              <a:rPr lang="en-US" b="1" dirty="0" err="1">
-                <a:latin typeface="Cascadia Mono" panose="020B0609020000020004" pitchFamily="49" charset="0"/>
-                <a:cs typeface="Cascadia Mono" panose="020B0609020000020004" pitchFamily="49" charset="0"/>
-              </a:rPr>
-              <a:t>releaseDate</a:t>
-            </a:r>
-            <a:r>
-              <a:rPr lang="en-US" b="1" dirty="0">
-                <a:latin typeface="Cascadia Mono" panose="020B0609020000020004" pitchFamily="49" charset="0"/>
-                <a:cs typeface="Cascadia Mono" panose="020B0609020000020004" pitchFamily="49" charset="0"/>
-              </a:rPr>
-              <a:t>)</a:t>
-            </a:r>
-          </a:p>
-          <a:p>
-            <a:r>
-              <a:rPr lang="da-DK" b="1" dirty="0">
-                <a:latin typeface="Cascadia Mono" panose="020B0609020000020004" pitchFamily="49" charset="0"/>
-                <a:cs typeface="Cascadia Mono" panose="020B0609020000020004" pitchFamily="49" charset="0"/>
-              </a:rPr>
-              <a:t>     {</a:t>
-            </a:r>
-          </a:p>
-          <a:p>
-            <a:r>
-              <a:rPr lang="da-DK" b="1" dirty="0">
-                <a:latin typeface="Cascadia Mono" panose="020B0609020000020004" pitchFamily="49" charset="0"/>
-                <a:cs typeface="Cascadia Mono" panose="020B0609020000020004" pitchFamily="49" charset="0"/>
-              </a:rPr>
-              <a:t>         </a:t>
-            </a:r>
-            <a:r>
-              <a:rPr lang="en-US" b="1" dirty="0">
-                <a:solidFill>
-                  <a:srgbClr val="FFFF00"/>
-                </a:solidFill>
-                <a:latin typeface="Cascadia Mono" panose="020B0609020000020004" pitchFamily="49" charset="0"/>
-                <a:cs typeface="Cascadia Mono" panose="020B0609020000020004" pitchFamily="49" charset="0"/>
-              </a:rPr>
-              <a:t>Id</a:t>
-            </a:r>
-            <a:r>
-              <a:rPr lang="da-DK" b="1" dirty="0">
-                <a:latin typeface="Cascadia Mono" panose="020B0609020000020004" pitchFamily="49" charset="0"/>
-                <a:cs typeface="Cascadia Mono" panose="020B0609020000020004" pitchFamily="49" charset="0"/>
-              </a:rPr>
-              <a:t> = 0;</a:t>
-            </a:r>
-          </a:p>
-          <a:p>
-            <a:r>
-              <a:rPr lang="da-DK" b="1" dirty="0">
-                <a:latin typeface="Cascadia Mono" panose="020B0609020000020004" pitchFamily="49" charset="0"/>
-                <a:cs typeface="Cascadia Mono" panose="020B0609020000020004" pitchFamily="49" charset="0"/>
-              </a:rPr>
-              <a:t>         </a:t>
-            </a:r>
-            <a:r>
-              <a:rPr lang="da-DK" b="1" dirty="0">
-                <a:solidFill>
-                  <a:srgbClr val="FFFF00"/>
-                </a:solidFill>
-                <a:latin typeface="Cascadia Mono" panose="020B0609020000020004" pitchFamily="49" charset="0"/>
-                <a:cs typeface="Cascadia Mono" panose="020B0609020000020004" pitchFamily="49" charset="0"/>
-              </a:rPr>
-              <a:t>Title</a:t>
-            </a:r>
-            <a:r>
-              <a:rPr lang="da-DK" b="1" dirty="0">
-                <a:latin typeface="Cascadia Mono" panose="020B0609020000020004" pitchFamily="49" charset="0"/>
-                <a:cs typeface="Cascadia Mono" panose="020B0609020000020004" pitchFamily="49" charset="0"/>
-              </a:rPr>
-              <a:t> = </a:t>
-            </a:r>
-            <a:r>
-              <a:rPr lang="da-DK" b="1" dirty="0" err="1">
-                <a:latin typeface="Cascadia Mono" panose="020B0609020000020004" pitchFamily="49" charset="0"/>
-                <a:cs typeface="Cascadia Mono" panose="020B0609020000020004" pitchFamily="49" charset="0"/>
-              </a:rPr>
-              <a:t>title</a:t>
-            </a:r>
-            <a:r>
-              <a:rPr lang="da-DK" b="1" dirty="0">
-                <a:latin typeface="Cascadia Mono" panose="020B0609020000020004" pitchFamily="49" charset="0"/>
-                <a:cs typeface="Cascadia Mono" panose="020B0609020000020004" pitchFamily="49" charset="0"/>
-              </a:rPr>
-              <a:t>;</a:t>
-            </a:r>
-          </a:p>
-          <a:p>
-            <a:r>
-              <a:rPr lang="da-DK" b="1" dirty="0">
-                <a:latin typeface="Cascadia Mono" panose="020B0609020000020004" pitchFamily="49" charset="0"/>
-                <a:cs typeface="Cascadia Mono" panose="020B0609020000020004" pitchFamily="49" charset="0"/>
-              </a:rPr>
-              <a:t>         </a:t>
-            </a:r>
-            <a:r>
-              <a:rPr lang="da-DK" b="1" dirty="0" err="1">
-                <a:solidFill>
-                  <a:srgbClr val="FFFF00"/>
-                </a:solidFill>
-                <a:latin typeface="Cascadia Mono" panose="020B0609020000020004" pitchFamily="49" charset="0"/>
-                <a:cs typeface="Cascadia Mono" panose="020B0609020000020004" pitchFamily="49" charset="0"/>
-              </a:rPr>
-              <a:t>Length</a:t>
-            </a:r>
-            <a:r>
-              <a:rPr lang="da-DK" b="1" dirty="0">
-                <a:latin typeface="Cascadia Mono" panose="020B0609020000020004" pitchFamily="49" charset="0"/>
-                <a:cs typeface="Cascadia Mono" panose="020B0609020000020004" pitchFamily="49" charset="0"/>
-              </a:rPr>
-              <a:t> = </a:t>
-            </a:r>
-            <a:r>
-              <a:rPr lang="da-DK" b="1" dirty="0" err="1">
-                <a:latin typeface="Cascadia Mono" panose="020B0609020000020004" pitchFamily="49" charset="0"/>
-                <a:cs typeface="Cascadia Mono" panose="020B0609020000020004" pitchFamily="49" charset="0"/>
-              </a:rPr>
-              <a:t>length</a:t>
-            </a:r>
-            <a:r>
-              <a:rPr lang="da-DK" b="1" dirty="0">
-                <a:latin typeface="Cascadia Mono" panose="020B0609020000020004" pitchFamily="49" charset="0"/>
-                <a:cs typeface="Cascadia Mono" panose="020B0609020000020004" pitchFamily="49" charset="0"/>
-              </a:rPr>
-              <a:t>;</a:t>
-            </a:r>
-          </a:p>
-          <a:p>
-            <a:r>
-              <a:rPr lang="da-DK" b="1" dirty="0">
-                <a:latin typeface="Cascadia Mono" panose="020B0609020000020004" pitchFamily="49" charset="0"/>
-                <a:cs typeface="Cascadia Mono" panose="020B0609020000020004" pitchFamily="49" charset="0"/>
-              </a:rPr>
-              <a:t>         </a:t>
-            </a:r>
-            <a:r>
-              <a:rPr lang="da-DK" b="1" dirty="0" err="1">
-                <a:solidFill>
-                  <a:srgbClr val="FFFF00"/>
-                </a:solidFill>
-                <a:latin typeface="Cascadia Mono" panose="020B0609020000020004" pitchFamily="49" charset="0"/>
-                <a:cs typeface="Cascadia Mono" panose="020B0609020000020004" pitchFamily="49" charset="0"/>
-              </a:rPr>
-              <a:t>ReleaseDate</a:t>
-            </a:r>
-            <a:r>
-              <a:rPr lang="da-DK" b="1" dirty="0">
-                <a:latin typeface="Cascadia Mono" panose="020B0609020000020004" pitchFamily="49" charset="0"/>
-                <a:cs typeface="Cascadia Mono" panose="020B0609020000020004" pitchFamily="49" charset="0"/>
-              </a:rPr>
-              <a:t> = </a:t>
-            </a:r>
-            <a:r>
-              <a:rPr lang="da-DK" b="1" dirty="0" err="1">
-                <a:latin typeface="Cascadia Mono" panose="020B0609020000020004" pitchFamily="49" charset="0"/>
-                <a:cs typeface="Cascadia Mono" panose="020B0609020000020004" pitchFamily="49" charset="0"/>
-              </a:rPr>
-              <a:t>releaseDate</a:t>
-            </a:r>
-            <a:r>
-              <a:rPr lang="da-DK" b="1" dirty="0">
-                <a:latin typeface="Cascadia Mono" panose="020B0609020000020004" pitchFamily="49" charset="0"/>
-                <a:cs typeface="Cascadia Mono" panose="020B0609020000020004" pitchFamily="49" charset="0"/>
-              </a:rPr>
-              <a:t>;</a:t>
-            </a:r>
-          </a:p>
-          <a:p>
-            <a:r>
-              <a:rPr lang="da-DK" b="1" dirty="0">
-                <a:latin typeface="Cascadia Mono" panose="020B0609020000020004" pitchFamily="49" charset="0"/>
-                <a:cs typeface="Cascadia Mono" panose="020B0609020000020004" pitchFamily="49" charset="0"/>
-              </a:rPr>
-              <a:t>     }</a:t>
-            </a:r>
-          </a:p>
-          <a:p>
-            <a:r>
-              <a:rPr lang="da-DK" b="1" dirty="0">
-                <a:latin typeface="Cascadia Mono" panose="020B0609020000020004" pitchFamily="49" charset="0"/>
-                <a:cs typeface="Cascadia Mono" panose="020B0609020000020004" pitchFamily="49" charset="0"/>
-              </a:rPr>
-              <a:t>}</a:t>
-            </a:r>
-            <a:endParaRPr lang="da-DK" b="1" dirty="0">
-              <a:solidFill>
-                <a:schemeClr val="bg1">
-                  <a:lumMod val="95000"/>
-                </a:schemeClr>
-              </a:solidFill>
-              <a:latin typeface="Cascadia Mono" panose="020B0609020000020004" pitchFamily="49" charset="0"/>
-              <a:cs typeface="Cascadia Mono" panose="020B0609020000020004" pitchFamily="49" charset="0"/>
-            </a:endParaRPr>
-          </a:p>
-        </p:txBody>
-      </p:sp>
-      <p:sp>
-        <p:nvSpPr>
-          <p:cNvPr id="5" name="Tekstfelt 4">
-            <a:extLst>
-              <a:ext uri="{FF2B5EF4-FFF2-40B4-BE49-F238E27FC236}">
-                <a16:creationId xmlns:a16="http://schemas.microsoft.com/office/drawing/2014/main" id="{E145C3F0-4B01-8F1F-5B25-26D6A5DC06EC}"/>
-              </a:ext>
-            </a:extLst>
-          </p:cNvPr>
-          <p:cNvSpPr txBox="1"/>
-          <p:nvPr/>
-        </p:nvSpPr>
-        <p:spPr>
-          <a:xfrm>
-            <a:off x="663234" y="592594"/>
-            <a:ext cx="1519968" cy="584775"/>
-          </a:xfrm>
-          <a:prstGeom prst="rect">
-            <a:avLst/>
-          </a:prstGeom>
-          <a:noFill/>
-        </p:spPr>
-        <p:txBody>
-          <a:bodyPr wrap="none" rtlCol="0">
-            <a:spAutoFit/>
-          </a:bodyPr>
-          <a:lstStyle/>
-          <a:p>
-            <a:r>
-              <a:rPr lang="da-DK" sz="3200" b="1" dirty="0"/>
-              <a:t>Domain</a:t>
-            </a:r>
+            <a:pPr algn="ctr"/>
+            <a:endParaRPr lang="da-DK"/>
           </a:p>
         </p:txBody>
       </p:sp>
     </p:spTree>
     <p:extLst>
       <p:ext uri="{BB962C8B-B14F-4D97-AF65-F5344CB8AC3E}">
-        <p14:creationId xmlns:p14="http://schemas.microsoft.com/office/powerpoint/2010/main" val="1560945924"/>
+        <p14:creationId xmlns:p14="http://schemas.microsoft.com/office/powerpoint/2010/main" val="1136382197"/>
       </p:ext>
     </p:extLst>
   </p:cSld>
@@ -19062,10 +18270,10 @@
       </p:grpSpPr>
       <p:pic>
         <p:nvPicPr>
-          <p:cNvPr id="4" name="Billede 3">
+          <p:cNvPr id="2" name="Billede 1">
             <a:extLst>
               <a:ext uri="{FF2B5EF4-FFF2-40B4-BE49-F238E27FC236}">
-                <a16:creationId xmlns:a16="http://schemas.microsoft.com/office/drawing/2014/main" id="{8DB9C2C1-799E-497D-AF85-3EC32CD13DA9}"/>
+                <a16:creationId xmlns:a16="http://schemas.microsoft.com/office/drawing/2014/main" id="{F367EAA7-E335-4966-B94A-0B4B57EEF804}"/>
               </a:ext>
             </a:extLst>
           </p:cNvPr>
@@ -19082,174 +18290,18 @@
         </p:blipFill>
         <p:spPr>
           <a:xfrm>
-            <a:off x="736221" y="0"/>
-            <a:ext cx="10719557" cy="6858000"/>
+            <a:off x="1574801" y="436093"/>
+            <a:ext cx="8695266" cy="5756021"/>
           </a:xfrm>
           <a:prstGeom prst="rect">
             <a:avLst/>
           </a:prstGeom>
         </p:spPr>
       </p:pic>
-      <p:sp>
-        <p:nvSpPr>
-          <p:cNvPr id="5" name="Rektangel 4">
-            <a:extLst>
-              <a:ext uri="{FF2B5EF4-FFF2-40B4-BE49-F238E27FC236}">
-                <a16:creationId xmlns:a16="http://schemas.microsoft.com/office/drawing/2014/main" id="{431EAD2B-86F1-484E-8F88-F3C0D9CC9A30}"/>
-              </a:ext>
-            </a:extLst>
-          </p:cNvPr>
-          <p:cNvSpPr/>
-          <p:nvPr/>
-        </p:nvSpPr>
-        <p:spPr>
-          <a:xfrm>
-            <a:off x="968188" y="2519082"/>
-            <a:ext cx="2707341" cy="439271"/>
-          </a:xfrm>
-          <a:prstGeom prst="rect">
-            <a:avLst/>
-          </a:prstGeom>
-          <a:noFill/>
-          <a:ln w="38100">
-            <a:solidFill>
-              <a:srgbClr val="FF0000"/>
-            </a:solidFill>
-          </a:ln>
-        </p:spPr>
-        <p:style>
-          <a:lnRef idx="2">
-            <a:schemeClr val="accent1">
-              <a:shade val="50000"/>
-            </a:schemeClr>
-          </a:lnRef>
-          <a:fillRef idx="1">
-            <a:schemeClr val="accent1"/>
-          </a:fillRef>
-          <a:effectRef idx="0">
-            <a:schemeClr val="accent1"/>
-          </a:effectRef>
-          <a:fontRef idx="minor">
-            <a:schemeClr val="lt1"/>
-          </a:fontRef>
-        </p:style>
-        <p:txBody>
-          <a:bodyPr rtlCol="0" anchor="ctr"/>
-          <a:lstStyle/>
-          <a:p>
-            <a:pPr algn="ctr"/>
-            <a:endParaRPr lang="da-DK"/>
-          </a:p>
-        </p:txBody>
-      </p:sp>
-      <p:sp>
-        <p:nvSpPr>
-          <p:cNvPr id="6" name="Rektangel 5">
-            <a:extLst>
-              <a:ext uri="{FF2B5EF4-FFF2-40B4-BE49-F238E27FC236}">
-                <a16:creationId xmlns:a16="http://schemas.microsoft.com/office/drawing/2014/main" id="{7DD5B483-34C0-4A3A-80EC-8E38BA0A7F7F}"/>
-              </a:ext>
-            </a:extLst>
-          </p:cNvPr>
-          <p:cNvSpPr/>
-          <p:nvPr/>
-        </p:nvSpPr>
-        <p:spPr>
-          <a:xfrm>
-            <a:off x="968187" y="3133164"/>
-            <a:ext cx="2707341" cy="591671"/>
-          </a:xfrm>
-          <a:prstGeom prst="rect">
-            <a:avLst/>
-          </a:prstGeom>
-          <a:noFill/>
-          <a:ln w="38100">
-            <a:solidFill>
-              <a:srgbClr val="FF0000"/>
-            </a:solidFill>
-          </a:ln>
-        </p:spPr>
-        <p:style>
-          <a:lnRef idx="2">
-            <a:schemeClr val="accent1">
-              <a:shade val="50000"/>
-            </a:schemeClr>
-          </a:lnRef>
-          <a:fillRef idx="1">
-            <a:schemeClr val="accent1"/>
-          </a:fillRef>
-          <a:effectRef idx="0">
-            <a:schemeClr val="accent1"/>
-          </a:effectRef>
-          <a:fontRef idx="minor">
-            <a:schemeClr val="lt1"/>
-          </a:fontRef>
-        </p:style>
-        <p:txBody>
-          <a:bodyPr rtlCol="0" anchor="ctr"/>
-          <a:lstStyle/>
-          <a:p>
-            <a:pPr algn="ctr"/>
-            <a:endParaRPr lang="da-DK"/>
-          </a:p>
-        </p:txBody>
-      </p:sp>
-      <p:sp>
-        <p:nvSpPr>
-          <p:cNvPr id="7" name="Rektangel 6">
-            <a:extLst>
-              <a:ext uri="{FF2B5EF4-FFF2-40B4-BE49-F238E27FC236}">
-                <a16:creationId xmlns:a16="http://schemas.microsoft.com/office/drawing/2014/main" id="{DB73467C-F786-490C-B432-FE24455573D8}"/>
-              </a:ext>
-            </a:extLst>
-          </p:cNvPr>
-          <p:cNvSpPr/>
-          <p:nvPr/>
-        </p:nvSpPr>
-        <p:spPr>
-          <a:xfrm>
-            <a:off x="968187" y="5181599"/>
-            <a:ext cx="2707341" cy="591671"/>
-          </a:xfrm>
-          <a:prstGeom prst="rect">
-            <a:avLst/>
-          </a:prstGeom>
-          <a:noFill/>
-          <a:ln w="38100">
-            <a:solidFill>
-              <a:srgbClr val="FF0000"/>
-            </a:solidFill>
-          </a:ln>
-        </p:spPr>
-        <p:style>
-          <a:lnRef idx="2">
-            <a:schemeClr val="accent1">
-              <a:shade val="50000"/>
-            </a:schemeClr>
-          </a:lnRef>
-          <a:fillRef idx="1">
-            <a:schemeClr val="accent1"/>
-          </a:fillRef>
-          <a:effectRef idx="0">
-            <a:schemeClr val="accent1"/>
-          </a:effectRef>
-          <a:fontRef idx="minor">
-            <a:schemeClr val="lt1"/>
-          </a:fontRef>
-        </p:style>
-        <p:txBody>
-          <a:bodyPr rtlCol="0" anchor="ctr"/>
-          <a:lstStyle/>
-          <a:p>
-            <a:pPr algn="ctr"/>
-            <a:endParaRPr lang="da-DK"/>
-          </a:p>
-        </p:txBody>
-      </p:sp>
     </p:spTree>
     <p:extLst>
       <p:ext uri="{BB962C8B-B14F-4D97-AF65-F5344CB8AC3E}">
-        <p14:creationId xmlns:p14="http://schemas.microsoft.com/office/powerpoint/2010/main" val="59442207"/>
+        <p14:creationId xmlns:p14="http://schemas.microsoft.com/office/powerpoint/2010/main" val="3060662196"/>
       </p:ext>
     </p:extLst>
   </p:cSld>
@@ -19288,40 +18340,137 @@
           <a:chExt cx="0" cy="0"/>
         </a:xfrm>
       </p:grpSpPr>
-      <p:pic>
-        <p:nvPicPr>
-          <p:cNvPr id="3" name="Billede 2">
+      <p:sp>
+        <p:nvSpPr>
+          <p:cNvPr id="2" name="Titel 1">
             <a:extLst>
               <a:ext uri="{FF2B5EF4-FFF2-40B4-BE49-F238E27FC236}">
-                <a16:creationId xmlns:a16="http://schemas.microsoft.com/office/drawing/2014/main" id="{00E52B61-F7E9-4CA2-B5E6-37928E0C1894}"/>
+                <a16:creationId xmlns:a16="http://schemas.microsoft.com/office/drawing/2014/main" id="{E7127DB6-3E97-44FB-BC0D-1D55ABD933E2}"/>
               </a:ext>
             </a:extLst>
           </p:cNvPr>
-          <p:cNvPicPr>
-            <a:picLocks noChangeAspect="1"/>
-          </p:cNvPicPr>
-          <p:nvPr/>
-        </p:nvPicPr>
-        <p:blipFill>
-          <a:blip r:embed="rId2"/>
-          <a:stretch>
-            <a:fillRect/>
-          </a:stretch>
-        </p:blipFill>
-        <p:spPr>
-          <a:xfrm>
-            <a:off x="0" y="190500"/>
-            <a:ext cx="12192000" cy="6477000"/>
-          </a:xfrm>
-          <a:prstGeom prst="rect">
-            <a:avLst/>
-          </a:prstGeom>
-        </p:spPr>
-      </p:pic>
+          <p:cNvSpPr>
+            <a:spLocks noGrp="1"/>
+          </p:cNvSpPr>
+          <p:nvPr>
+            <p:ph type="title"/>
+          </p:nvPr>
+        </p:nvSpPr>
+        <p:spPr/>
+        <p:txBody>
+          <a:bodyPr/>
+          <a:lstStyle/>
+          <a:p>
+            <a:r>
+              <a:rPr lang="da-DK"/>
+              <a:t>Web App with Domain class</a:t>
+            </a:r>
+          </a:p>
+        </p:txBody>
+      </p:sp>
+      <p:sp>
+        <p:nvSpPr>
+          <p:cNvPr id="3" name="Pladsholder til indhold 2">
+            <a:extLst>
+              <a:ext uri="{FF2B5EF4-FFF2-40B4-BE49-F238E27FC236}">
+                <a16:creationId xmlns:a16="http://schemas.microsoft.com/office/drawing/2014/main" id="{DD8807CE-E4D1-4E30-AABA-DB8BAAF66FD6}"/>
+              </a:ext>
+            </a:extLst>
+          </p:cNvPr>
+          <p:cNvSpPr>
+            <a:spLocks noGrp="1"/>
+          </p:cNvSpPr>
+          <p:nvPr>
+            <p:ph idx="1"/>
+          </p:nvPr>
+        </p:nvSpPr>
+        <p:spPr/>
+        <p:txBody>
+          <a:bodyPr/>
+          <a:lstStyle/>
+          <a:p>
+            <a:pPr marL="514350" indent="-514350">
+              <a:buFont typeface="+mj-lt"/>
+              <a:buAutoNum type="arabicPeriod"/>
+            </a:pPr>
+            <a:r>
+              <a:rPr lang="da-DK"/>
+              <a:t>Create a top-level folder named </a:t>
+            </a:r>
+            <a:r>
+              <a:rPr lang="da-DK" b="1"/>
+              <a:t>Services</a:t>
+            </a:r>
+            <a:r>
+              <a:rPr lang="da-DK"/>
+              <a:t>.</a:t>
+            </a:r>
+          </a:p>
+          <a:p>
+            <a:pPr marL="514350" indent="-514350">
+              <a:buFont typeface="+mj-lt"/>
+              <a:buAutoNum type="arabicPeriod"/>
+            </a:pPr>
+            <a:r>
+              <a:rPr lang="da-DK"/>
+              <a:t>In the </a:t>
+            </a:r>
+            <a:r>
+              <a:rPr lang="da-DK" b="1"/>
+              <a:t>Services</a:t>
+            </a:r>
+            <a:r>
+              <a:rPr lang="da-DK"/>
+              <a:t> folder, add an interface </a:t>
+            </a:r>
+            <a:r>
+              <a:rPr lang="da-DK" b="1"/>
+              <a:t>IMovieRepository</a:t>
+            </a:r>
+            <a:r>
+              <a:rPr lang="da-DK"/>
+              <a:t>.</a:t>
+            </a:r>
+          </a:p>
+          <a:p>
+            <a:pPr marL="514350" indent="-514350">
+              <a:buFont typeface="+mj-lt"/>
+              <a:buAutoNum type="arabicPeriod"/>
+            </a:pPr>
+            <a:r>
+              <a:rPr lang="da-DK"/>
+              <a:t>In the </a:t>
+            </a:r>
+            <a:r>
+              <a:rPr lang="da-DK" b="1"/>
+              <a:t>Services</a:t>
+            </a:r>
+            <a:r>
+              <a:rPr lang="da-DK"/>
+              <a:t> folder, add a class </a:t>
+            </a:r>
+            <a:r>
+              <a:rPr lang="da-DK" b="1"/>
+              <a:t>MovieRepository</a:t>
+            </a:r>
+            <a:r>
+              <a:rPr lang="da-DK"/>
+              <a:t>.</a:t>
+            </a:r>
+          </a:p>
+          <a:p>
+            <a:pPr marL="514350" indent="-514350">
+              <a:buFont typeface="+mj-lt"/>
+              <a:buAutoNum type="arabicPeriod"/>
+            </a:pPr>
+            <a:endParaRPr lang="da-DK"/>
+          </a:p>
+        </p:txBody>
+      </p:sp>
     </p:spTree>
     <p:extLst>
       <p:ext uri="{BB962C8B-B14F-4D97-AF65-F5344CB8AC3E}">
-        <p14:creationId xmlns:p14="http://schemas.microsoft.com/office/powerpoint/2010/main" val="609742274"/>
+        <p14:creationId xmlns:p14="http://schemas.microsoft.com/office/powerpoint/2010/main" val="3681151173"/>
       </p:ext>
     </p:extLst>
   </p:cSld>
@@ -19360,63 +18509,12 @@
           <a:chExt cx="0" cy="0"/>
         </a:xfrm>
       </p:grpSpPr>
-      <mc:AlternateContent xmlns:mc="http://schemas.openxmlformats.org/markup-compatibility/2006" xmlns:p14="http://schemas.microsoft.com/office/powerpoint/2010/main">
-        <mc:Choice Requires="p14">
-          <p:contentPart p14:bwMode="auto" r:id="rId2">
-            <p14:nvContentPartPr>
-              <p14:cNvPr id="3" name="Håndskrift 2">
-                <a:extLst>
-                  <a:ext uri="{FF2B5EF4-FFF2-40B4-BE49-F238E27FC236}">
-                    <a16:creationId xmlns:a16="http://schemas.microsoft.com/office/drawing/2014/main" id="{DD0DFB3E-F903-4A59-B0EC-8360794DBAEF}"/>
-                  </a:ext>
-                </a:extLst>
-              </p14:cNvPr>
-              <p14:cNvContentPartPr/>
-              <p14:nvPr/>
-            </p14:nvContentPartPr>
-            <p14:xfrm>
-              <a:off x="4643711" y="2456054"/>
-              <a:ext cx="574560" cy="9720"/>
-            </p14:xfrm>
-          </p:contentPart>
-        </mc:Choice>
-        <mc:Fallback xmlns="">
-          <p:pic>
-            <p:nvPicPr>
-              <p:cNvPr id="3" name="Håndskrift 2">
-                <a:extLst>
-                  <a:ext uri="{FF2B5EF4-FFF2-40B4-BE49-F238E27FC236}">
-                    <a16:creationId xmlns:a16="http://schemas.microsoft.com/office/drawing/2014/main" id="{DD0DFB3E-F903-4A59-B0EC-8360794DBAEF}"/>
-                  </a:ext>
-                </a:extLst>
-              </p:cNvPr>
-              <p:cNvPicPr/>
-              <p:nvPr/>
-            </p:nvPicPr>
-            <p:blipFill>
-              <a:blip r:embed="rId3"/>
-              <a:stretch>
-                <a:fillRect/>
-              </a:stretch>
-            </p:blipFill>
-            <p:spPr>
-              <a:xfrm>
-                <a:off x="4634711" y="2447414"/>
-                <a:ext cx="592200" cy="27360"/>
-              </a:xfrm>
-              <a:prstGeom prst="rect">
-                <a:avLst/>
-              </a:prstGeom>
-            </p:spPr>
-          </p:pic>
-        </mc:Fallback>
-      </mc:AlternateContent>
       <p:pic>
         <p:nvPicPr>
-          <p:cNvPr id="11" name="Billede 10">
+          <p:cNvPr id="2" name="Billede 1">
             <a:extLst>
               <a:ext uri="{FF2B5EF4-FFF2-40B4-BE49-F238E27FC236}">
-                <a16:creationId xmlns:a16="http://schemas.microsoft.com/office/drawing/2014/main" id="{BDD323E0-EBAE-4D9B-8C21-5D95CD95AFA9}"/>
+                <a16:creationId xmlns:a16="http://schemas.microsoft.com/office/drawing/2014/main" id="{2CD3C134-E3D2-4D47-865A-696E4998562E}"/>
               </a:ext>
             </a:extLst>
           </p:cNvPr>
@@ -19426,127 +18524,77 @@
           <p:nvPr/>
         </p:nvPicPr>
         <p:blipFill>
-          <a:blip r:embed="rId4"/>
+          <a:blip r:embed="rId2"/>
           <a:stretch>
             <a:fillRect/>
           </a:stretch>
         </p:blipFill>
         <p:spPr>
           <a:xfrm>
-            <a:off x="0" y="190500"/>
-            <a:ext cx="12192000" cy="6477000"/>
+            <a:off x="2590800" y="812875"/>
+            <a:ext cx="5138965" cy="3835495"/>
           </a:xfrm>
           <a:prstGeom prst="rect">
             <a:avLst/>
           </a:prstGeom>
         </p:spPr>
       </p:pic>
-      <mc:AlternateContent xmlns:mc="http://schemas.openxmlformats.org/markup-compatibility/2006" xmlns:p14="http://schemas.microsoft.com/office/powerpoint/2010/main">
-        <mc:Choice Requires="p14">
-          <p:contentPart p14:bwMode="auto" r:id="rId5">
-            <p14:nvContentPartPr>
-              <p14:cNvPr id="12" name="Håndskrift 11">
-                <a:extLst>
-                  <a:ext uri="{FF2B5EF4-FFF2-40B4-BE49-F238E27FC236}">
-                    <a16:creationId xmlns:a16="http://schemas.microsoft.com/office/drawing/2014/main" id="{96A63FCC-7259-4FA8-9DBC-4AC481E6787A}"/>
-                  </a:ext>
-                </a:extLst>
-              </p14:cNvPr>
-              <p14:cNvContentPartPr/>
-              <p14:nvPr/>
-            </p14:nvContentPartPr>
-            <p14:xfrm>
-              <a:off x="-466129" y="4347494"/>
-              <a:ext cx="360" cy="360"/>
-            </p14:xfrm>
-          </p:contentPart>
-        </mc:Choice>
-        <mc:Fallback xmlns="">
-          <p:pic>
-            <p:nvPicPr>
-              <p:cNvPr id="12" name="Håndskrift 11">
-                <a:extLst>
-                  <a:ext uri="{FF2B5EF4-FFF2-40B4-BE49-F238E27FC236}">
-                    <a16:creationId xmlns:a16="http://schemas.microsoft.com/office/drawing/2014/main" id="{96A63FCC-7259-4FA8-9DBC-4AC481E6787A}"/>
-                  </a:ext>
-                </a:extLst>
-              </p:cNvPr>
-              <p:cNvPicPr/>
-              <p:nvPr/>
-            </p:nvPicPr>
-            <p:blipFill>
-              <a:blip r:embed="rId6"/>
-              <a:stretch>
-                <a:fillRect/>
-              </a:stretch>
-            </p:blipFill>
-            <p:spPr>
-              <a:xfrm>
-                <a:off x="-502129" y="4311854"/>
-                <a:ext cx="72000" cy="72000"/>
-              </a:xfrm>
-              <a:prstGeom prst="rect">
-                <a:avLst/>
-              </a:prstGeom>
-            </p:spPr>
-          </p:pic>
-        </mc:Fallback>
-      </mc:AlternateContent>
-      <mc:AlternateContent xmlns:mc="http://schemas.openxmlformats.org/markup-compatibility/2006" xmlns:p14="http://schemas.microsoft.com/office/powerpoint/2010/main">
-        <mc:Choice Requires="p14">
-          <p:contentPart p14:bwMode="auto" r:id="rId7">
-            <p14:nvContentPartPr>
-              <p14:cNvPr id="14" name="Håndskrift 13">
-                <a:extLst>
-                  <a:ext uri="{FF2B5EF4-FFF2-40B4-BE49-F238E27FC236}">
-                    <a16:creationId xmlns:a16="http://schemas.microsoft.com/office/drawing/2014/main" id="{8568FBEA-1343-473A-A43E-0CCE72F32C29}"/>
-                  </a:ext>
-                </a:extLst>
-              </p14:cNvPr>
-              <p14:cNvContentPartPr/>
-              <p14:nvPr/>
-            </p14:nvContentPartPr>
-            <p14:xfrm>
-              <a:off x="3388751" y="1281734"/>
-              <a:ext cx="1756080" cy="59760"/>
-            </p14:xfrm>
-          </p:contentPart>
-        </mc:Choice>
-        <mc:Fallback xmlns="">
-          <p:pic>
-            <p:nvPicPr>
-              <p:cNvPr id="14" name="Håndskrift 13">
-                <a:extLst>
-                  <a:ext uri="{FF2B5EF4-FFF2-40B4-BE49-F238E27FC236}">
-                    <a16:creationId xmlns:a16="http://schemas.microsoft.com/office/drawing/2014/main" id="{8568FBEA-1343-473A-A43E-0CCE72F32C29}"/>
-                  </a:ext>
-                </a:extLst>
-              </p:cNvPr>
-              <p:cNvPicPr/>
-              <p:nvPr/>
-            </p:nvPicPr>
-            <p:blipFill>
-              <a:blip r:embed="rId8"/>
-              <a:stretch>
-                <a:fillRect/>
-              </a:stretch>
-            </p:blipFill>
-            <p:spPr>
-              <a:xfrm>
-                <a:off x="3352751" y="1245734"/>
-                <a:ext cx="1827720" cy="131400"/>
-              </a:xfrm>
-              <a:prstGeom prst="rect">
-                <a:avLst/>
-              </a:prstGeom>
-            </p:spPr>
-          </p:pic>
-        </mc:Fallback>
-      </mc:AlternateContent>
+      <p:sp>
+        <p:nvSpPr>
+          <p:cNvPr id="5" name="Rektangel 4">
+            <a:extLst>
+              <a:ext uri="{FF2B5EF4-FFF2-40B4-BE49-F238E27FC236}">
+                <a16:creationId xmlns:a16="http://schemas.microsoft.com/office/drawing/2014/main" id="{3CA2EE8C-9DC1-4B74-A715-37D041528463}"/>
+              </a:ext>
+            </a:extLst>
+          </p:cNvPr>
+          <p:cNvSpPr/>
+          <p:nvPr/>
+        </p:nvSpPr>
+        <p:spPr>
+          <a:xfrm>
+            <a:off x="2827867" y="2844800"/>
+            <a:ext cx="3124200" cy="956734"/>
+          </a:xfrm>
+          <a:prstGeom prst="rect">
+            <a:avLst/>
+          </a:prstGeom>
+          <a:noFill/>
+          <a:ln w="38100">
+            <a:solidFill>
+              <a:srgbClr val="FF0000"/>
+            </a:solidFill>
+          </a:ln>
+        </p:spPr>
+        <p:style>
+          <a:lnRef idx="2">
+            <a:schemeClr val="accent1">
+              <a:shade val="50000"/>
+            </a:schemeClr>
+          </a:lnRef>
+          <a:fillRef idx="1">
+            <a:schemeClr val="accent1"/>
+          </a:fillRef>
+          <a:effectRef idx="0">
+            <a:schemeClr val="accent1"/>
+          </a:effectRef>
+          <a:fontRef idx="minor">
+            <a:schemeClr val="lt1"/>
+          </a:fontRef>
+        </p:style>
+        <p:txBody>
+          <a:bodyPr rtlCol="0" anchor="ctr"/>
+          <a:lstStyle/>
+          <a:p>
+            <a:pPr algn="ctr"/>
+            <a:endParaRPr lang="da-DK"/>
+          </a:p>
+        </p:txBody>
+      </p:sp>
     </p:spTree>
     <p:extLst>
       <p:ext uri="{BB962C8B-B14F-4D97-AF65-F5344CB8AC3E}">
-        <p14:creationId xmlns:p14="http://schemas.microsoft.com/office/powerpoint/2010/main" val="2251405186"/>
+        <p14:creationId xmlns:p14="http://schemas.microsoft.com/office/powerpoint/2010/main" val="4050481163"/>
       </p:ext>
     </p:extLst>
   </p:cSld>
@@ -19590,7 +18638,7 @@
           <p:cNvPr id="3" name="Billede 2">
             <a:extLst>
               <a:ext uri="{FF2B5EF4-FFF2-40B4-BE49-F238E27FC236}">
-                <a16:creationId xmlns:a16="http://schemas.microsoft.com/office/drawing/2014/main" id="{9B446F8E-5427-45A8-9B1C-80144705E2A3}"/>
+                <a16:creationId xmlns:a16="http://schemas.microsoft.com/office/drawing/2014/main" id="{52E1E13F-9856-4557-9752-9721D6193C72}"/>
               </a:ext>
             </a:extLst>
           </p:cNvPr>
@@ -19607,69 +18655,48 @@
         </p:blipFill>
         <p:spPr>
           <a:xfrm>
-            <a:off x="0" y="190500"/>
-            <a:ext cx="12192000" cy="6477000"/>
+            <a:off x="374963" y="1938246"/>
+            <a:ext cx="4393005" cy="1863287"/>
           </a:xfrm>
           <a:prstGeom prst="rect">
             <a:avLst/>
           </a:prstGeom>
         </p:spPr>
       </p:pic>
-      <mc:AlternateContent xmlns:mc="http://schemas.openxmlformats.org/markup-compatibility/2006" xmlns:p14="http://schemas.microsoft.com/office/powerpoint/2010/main">
-        <mc:Choice Requires="p14">
-          <p:contentPart p14:bwMode="auto" r:id="rId3">
-            <p14:nvContentPartPr>
-              <p14:cNvPr id="5" name="Håndskrift 4">
-                <a:extLst>
-                  <a:ext uri="{FF2B5EF4-FFF2-40B4-BE49-F238E27FC236}">
-                    <a16:creationId xmlns:a16="http://schemas.microsoft.com/office/drawing/2014/main" id="{9A1E6F60-2362-4D86-B3EE-83402E149E0A}"/>
-                  </a:ext>
-                </a:extLst>
-              </p14:cNvPr>
-              <p14:cNvContentPartPr/>
-              <p14:nvPr/>
-            </p14:nvContentPartPr>
-            <p14:xfrm>
-              <a:off x="4123511" y="1326374"/>
-              <a:ext cx="1308240" cy="27720"/>
-            </p14:xfrm>
-          </p:contentPart>
-        </mc:Choice>
-        <mc:Fallback xmlns="">
-          <p:pic>
-            <p:nvPicPr>
-              <p:cNvPr id="5" name="Håndskrift 4">
-                <a:extLst>
-                  <a:ext uri="{FF2B5EF4-FFF2-40B4-BE49-F238E27FC236}">
-                    <a16:creationId xmlns:a16="http://schemas.microsoft.com/office/drawing/2014/main" id="{9A1E6F60-2362-4D86-B3EE-83402E149E0A}"/>
-                  </a:ext>
-                </a:extLst>
-              </p:cNvPr>
-              <p:cNvPicPr/>
-              <p:nvPr/>
-            </p:nvPicPr>
-            <p:blipFill>
-              <a:blip r:embed="rId4"/>
-              <a:stretch>
-                <a:fillRect/>
-              </a:stretch>
-            </p:blipFill>
-            <p:spPr>
-              <a:xfrm>
-                <a:off x="4087871" y="1290265"/>
-                <a:ext cx="1379880" cy="100303"/>
-              </a:xfrm>
-              <a:prstGeom prst="rect">
-                <a:avLst/>
-              </a:prstGeom>
-            </p:spPr>
-          </p:pic>
-        </mc:Fallback>
-      </mc:AlternateContent>
+      <p:pic>
+        <p:nvPicPr>
+          <p:cNvPr id="4" name="Billede 3">
+            <a:extLst>
+              <a:ext uri="{FF2B5EF4-FFF2-40B4-BE49-F238E27FC236}">
+                <a16:creationId xmlns:a16="http://schemas.microsoft.com/office/drawing/2014/main" id="{5A30ED2C-2F53-4253-817F-2E1E47C962D9}"/>
+              </a:ext>
+            </a:extLst>
+          </p:cNvPr>
+          <p:cNvPicPr>
+            <a:picLocks noChangeAspect="1"/>
+          </p:cNvPicPr>
+          <p:nvPr/>
+        </p:nvPicPr>
+        <p:blipFill>
+          <a:blip r:embed="rId3"/>
+          <a:stretch>
+            <a:fillRect/>
+          </a:stretch>
+        </p:blipFill>
+        <p:spPr>
+          <a:xfrm>
+            <a:off x="6232218" y="435518"/>
+            <a:ext cx="5477182" cy="5986963"/>
+          </a:xfrm>
+          <a:prstGeom prst="rect">
+            <a:avLst/>
+          </a:prstGeom>
+        </p:spPr>
+      </p:pic>
     </p:spTree>
     <p:extLst>
       <p:ext uri="{BB962C8B-B14F-4D97-AF65-F5344CB8AC3E}">
-        <p14:creationId xmlns:p14="http://schemas.microsoft.com/office/powerpoint/2010/main" val="2172703734"/>
+        <p14:creationId xmlns:p14="http://schemas.microsoft.com/office/powerpoint/2010/main" val="2198373170"/>
       </p:ext>
     </p:extLst>
   </p:cSld>
@@ -19708,84 +18735,86 @@
           <a:chExt cx="0" cy="0"/>
         </a:xfrm>
       </p:grpSpPr>
-      <p:pic>
-        <p:nvPicPr>
-          <p:cNvPr id="3" name="Billede 2">
+      <p:sp>
+        <p:nvSpPr>
+          <p:cNvPr id="2" name="Titel 1">
             <a:extLst>
               <a:ext uri="{FF2B5EF4-FFF2-40B4-BE49-F238E27FC236}">
-                <a16:creationId xmlns:a16="http://schemas.microsoft.com/office/drawing/2014/main" id="{4C649AB6-2400-4057-BF5F-F6F2E84795F1}"/>
+                <a16:creationId xmlns:a16="http://schemas.microsoft.com/office/drawing/2014/main" id="{E7127DB6-3E97-44FB-BC0D-1D55ABD933E2}"/>
               </a:ext>
             </a:extLst>
           </p:cNvPr>
-          <p:cNvPicPr>
-            <a:picLocks noChangeAspect="1"/>
-          </p:cNvPicPr>
-          <p:nvPr/>
-        </p:nvPicPr>
-        <p:blipFill>
-          <a:blip r:embed="rId2"/>
-          <a:stretch>
-            <a:fillRect/>
-          </a:stretch>
-        </p:blipFill>
-        <p:spPr>
-          <a:xfrm>
-            <a:off x="0" y="190500"/>
-            <a:ext cx="12192000" cy="6477000"/>
-          </a:xfrm>
-          <a:prstGeom prst="rect">
-            <a:avLst/>
-          </a:prstGeom>
-        </p:spPr>
-      </p:pic>
+          <p:cNvSpPr>
+            <a:spLocks noGrp="1"/>
+          </p:cNvSpPr>
+          <p:nvPr>
+            <p:ph type="title"/>
+          </p:nvPr>
+        </p:nvSpPr>
+        <p:spPr/>
+        <p:txBody>
+          <a:bodyPr/>
+          <a:lstStyle/>
+          <a:p>
+            <a:r>
+              <a:rPr lang="da-DK"/>
+              <a:t>Web App with Domain class</a:t>
+            </a:r>
+          </a:p>
+        </p:txBody>
+      </p:sp>
       <p:sp>
         <p:nvSpPr>
-          <p:cNvPr id="4" name="Rektangel 3">
+          <p:cNvPr id="3" name="Pladsholder til indhold 2">
             <a:extLst>
               <a:ext uri="{FF2B5EF4-FFF2-40B4-BE49-F238E27FC236}">
-                <a16:creationId xmlns:a16="http://schemas.microsoft.com/office/drawing/2014/main" id="{6E13154E-546D-4DDF-8871-949108F13FB2}"/>
+                <a16:creationId xmlns:a16="http://schemas.microsoft.com/office/drawing/2014/main" id="{DD8807CE-E4D1-4E30-AABA-DB8BAAF66FD6}"/>
               </a:ext>
             </a:extLst>
           </p:cNvPr>
-          <p:cNvSpPr/>
-          <p:nvPr/>
+          <p:cNvSpPr>
+            <a:spLocks noGrp="1"/>
+          </p:cNvSpPr>
+          <p:nvPr>
+            <p:ph idx="1"/>
+          </p:nvPr>
         </p:nvSpPr>
         <p:spPr>
           <a:xfrm>
-            <a:off x="2976282" y="2232212"/>
-            <a:ext cx="6974542" cy="358588"/>
+            <a:off x="838200" y="1825625"/>
+            <a:ext cx="8568267" cy="4351338"/>
           </a:xfrm>
-          <a:prstGeom prst="rect">
-            <a:avLst/>
-          </a:prstGeom>
-          <a:noFill/>
-          <a:ln w="38100">
-            <a:solidFill>
-              <a:srgbClr val="FF0000"/>
-            </a:solidFill>
-          </a:ln>
         </p:spPr>
-        <p:style>
-          <a:lnRef idx="2">
-            <a:schemeClr val="accent1">
-              <a:shade val="50000"/>
-            </a:schemeClr>
-          </a:lnRef>
-          <a:fillRef idx="1">
-            <a:schemeClr val="accent1"/>
-          </a:fillRef>
-          <a:effectRef idx="0">
-            <a:schemeClr val="accent1"/>
-          </a:effectRef>
-          <a:fontRef idx="minor">
-            <a:schemeClr val="lt1"/>
-          </a:fontRef>
-        </p:style>
         <p:txBody>
-          <a:bodyPr rtlCol="0" anchor="ctr"/>
+          <a:bodyPr/>
           <a:lstStyle/>
           <a:p>
-            <a:pPr algn="ctr"/>
+            <a:pPr marL="514350" indent="-514350">
+              <a:buFont typeface="+mj-lt"/>
+              <a:buAutoNum type="arabicPeriod"/>
+            </a:pPr>
+            <a:r>
+              <a:rPr lang="da-DK"/>
+              <a:t>Register </a:t>
+            </a:r>
+            <a:r>
+              <a:rPr lang="da-DK" b="1"/>
+              <a:t>IMovieRepository/MovieRepository</a:t>
+            </a:r>
+            <a:r>
+              <a:rPr lang="da-DK"/>
+              <a:t> as a service in </a:t>
+            </a:r>
+            <a:r>
+              <a:rPr lang="da-DK" b="1"/>
+              <a:t>Program.cs</a:t>
+            </a:r>
+          </a:p>
+          <a:p>
+            <a:pPr marL="514350" indent="-514350">
+              <a:buFont typeface="+mj-lt"/>
+              <a:buAutoNum type="arabicPeriod"/>
+            </a:pPr>
             <a:endParaRPr lang="da-DK"/>
           </a:p>
         </p:txBody>
@@ -19793,7 +18822,7 @@
     </p:spTree>
     <p:extLst>
       <p:ext uri="{BB962C8B-B14F-4D97-AF65-F5344CB8AC3E}">
-        <p14:creationId xmlns:p14="http://schemas.microsoft.com/office/powerpoint/2010/main" val="2446275140"/>
+        <p14:creationId xmlns:p14="http://schemas.microsoft.com/office/powerpoint/2010/main" val="3853949825"/>
       </p:ext>
     </p:extLst>
   </p:cSld>
@@ -19834,10 +18863,10 @@
       </p:grpSpPr>
       <p:pic>
         <p:nvPicPr>
-          <p:cNvPr id="2" name="Billede 1">
+          <p:cNvPr id="3" name="Billede 2">
             <a:extLst>
               <a:ext uri="{FF2B5EF4-FFF2-40B4-BE49-F238E27FC236}">
-                <a16:creationId xmlns:a16="http://schemas.microsoft.com/office/drawing/2014/main" id="{F8198108-0194-4D5F-9DBD-5DD15FADCF11}"/>
+                <a16:creationId xmlns:a16="http://schemas.microsoft.com/office/drawing/2014/main" id="{17D3A0B8-0299-4268-AB93-FCA861977E1E}"/>
               </a:ext>
             </a:extLst>
           </p:cNvPr>
@@ -19854,120 +18883,70 @@
         </p:blipFill>
         <p:spPr>
           <a:xfrm>
-            <a:off x="0" y="190500"/>
-            <a:ext cx="12192000" cy="6477000"/>
+            <a:off x="990142" y="1665759"/>
+            <a:ext cx="9795585" cy="1195973"/>
           </a:xfrm>
           <a:prstGeom prst="rect">
             <a:avLst/>
           </a:prstGeom>
         </p:spPr>
       </p:pic>
-      <mc:AlternateContent xmlns:mc="http://schemas.openxmlformats.org/markup-compatibility/2006" xmlns:p14="http://schemas.microsoft.com/office/powerpoint/2010/main">
-        <mc:Choice Requires="p14">
-          <p:contentPart p14:bwMode="auto" r:id="rId3">
-            <p14:nvContentPartPr>
-              <p14:cNvPr id="4" name="Håndskrift 3">
-                <a:extLst>
-                  <a:ext uri="{FF2B5EF4-FFF2-40B4-BE49-F238E27FC236}">
-                    <a16:creationId xmlns:a16="http://schemas.microsoft.com/office/drawing/2014/main" id="{A15A1FD4-4412-4D61-82AE-E0BDD2403EE0}"/>
-                  </a:ext>
-                </a:extLst>
-              </p14:cNvPr>
-              <p14:cNvContentPartPr/>
-              <p14:nvPr/>
-            </p14:nvContentPartPr>
-            <p14:xfrm>
-              <a:off x="-439489" y="4738814"/>
-              <a:ext cx="360" cy="3960"/>
-            </p14:xfrm>
-          </p:contentPart>
-        </mc:Choice>
-        <mc:Fallback xmlns="">
-          <p:pic>
-            <p:nvPicPr>
-              <p:cNvPr id="4" name="Håndskrift 3">
-                <a:extLst>
-                  <a:ext uri="{FF2B5EF4-FFF2-40B4-BE49-F238E27FC236}">
-                    <a16:creationId xmlns:a16="http://schemas.microsoft.com/office/drawing/2014/main" id="{A15A1FD4-4412-4D61-82AE-E0BDD2403EE0}"/>
-                  </a:ext>
-                </a:extLst>
-              </p:cNvPr>
-              <p:cNvPicPr/>
-              <p:nvPr/>
-            </p:nvPicPr>
-            <p:blipFill>
-              <a:blip r:embed="rId4"/>
-              <a:stretch>
-                <a:fillRect/>
-              </a:stretch>
-            </p:blipFill>
-            <p:spPr>
-              <a:xfrm>
-                <a:off x="-475489" y="4702814"/>
-                <a:ext cx="72000" cy="75600"/>
-              </a:xfrm>
-              <a:prstGeom prst="rect">
-                <a:avLst/>
-              </a:prstGeom>
-            </p:spPr>
-          </p:pic>
-        </mc:Fallback>
-      </mc:AlternateContent>
-      <mc:AlternateContent xmlns:mc="http://schemas.openxmlformats.org/markup-compatibility/2006" xmlns:p14="http://schemas.microsoft.com/office/powerpoint/2010/main">
-        <mc:Choice Requires="p14">
-          <p:contentPart p14:bwMode="auto" r:id="rId5">
-            <p14:nvContentPartPr>
-              <p14:cNvPr id="5" name="Håndskrift 4">
-                <a:extLst>
-                  <a:ext uri="{FF2B5EF4-FFF2-40B4-BE49-F238E27FC236}">
-                    <a16:creationId xmlns:a16="http://schemas.microsoft.com/office/drawing/2014/main" id="{3939B90D-A09E-42F2-828D-0BA9072BC1FC}"/>
-                  </a:ext>
-                </a:extLst>
-              </p14:cNvPr>
-              <p14:cNvContentPartPr/>
-              <p14:nvPr/>
-            </p14:nvContentPartPr>
-            <p14:xfrm>
-              <a:off x="5306831" y="2868614"/>
-              <a:ext cx="1102320" cy="29160"/>
-            </p14:xfrm>
-          </p:contentPart>
-        </mc:Choice>
-        <mc:Fallback xmlns="">
-          <p:pic>
-            <p:nvPicPr>
-              <p:cNvPr id="5" name="Håndskrift 4">
-                <a:extLst>
-                  <a:ext uri="{FF2B5EF4-FFF2-40B4-BE49-F238E27FC236}">
-                    <a16:creationId xmlns:a16="http://schemas.microsoft.com/office/drawing/2014/main" id="{3939B90D-A09E-42F2-828D-0BA9072BC1FC}"/>
-                  </a:ext>
-                </a:extLst>
-              </p:cNvPr>
-              <p:cNvPicPr/>
-              <p:nvPr/>
-            </p:nvPicPr>
-            <p:blipFill>
-              <a:blip r:embed="rId6"/>
-              <a:stretch>
-                <a:fillRect/>
-              </a:stretch>
-            </p:blipFill>
-            <p:spPr>
-              <a:xfrm>
-                <a:off x="5271191" y="2832614"/>
-                <a:ext cx="1173960" cy="100800"/>
-              </a:xfrm>
-              <a:prstGeom prst="rect">
-                <a:avLst/>
-              </a:prstGeom>
-            </p:spPr>
-          </p:pic>
-        </mc:Fallback>
-      </mc:AlternateContent>
+      <p:sp>
+        <p:nvSpPr>
+          <p:cNvPr id="6" name="Rektangel 5">
+            <a:extLst>
+              <a:ext uri="{FF2B5EF4-FFF2-40B4-BE49-F238E27FC236}">
+                <a16:creationId xmlns:a16="http://schemas.microsoft.com/office/drawing/2014/main" id="{DB2A4A97-2A10-42B7-B5FA-ABC3829B7D19}"/>
+              </a:ext>
+            </a:extLst>
+          </p:cNvPr>
+          <p:cNvSpPr/>
+          <p:nvPr/>
+        </p:nvSpPr>
+        <p:spPr>
+          <a:xfrm>
+            <a:off x="804333" y="2404534"/>
+            <a:ext cx="9423400" cy="304800"/>
+          </a:xfrm>
+          <a:prstGeom prst="rect">
+            <a:avLst/>
+          </a:prstGeom>
+          <a:noFill/>
+          <a:ln w="38100">
+            <a:solidFill>
+              <a:srgbClr val="FF0000"/>
+            </a:solidFill>
+          </a:ln>
+        </p:spPr>
+        <p:style>
+          <a:lnRef idx="2">
+            <a:schemeClr val="accent1">
+              <a:shade val="50000"/>
+            </a:schemeClr>
+          </a:lnRef>
+          <a:fillRef idx="1">
+            <a:schemeClr val="accent1"/>
+          </a:fillRef>
+          <a:effectRef idx="0">
+            <a:schemeClr val="accent1"/>
+          </a:effectRef>
+          <a:fontRef idx="minor">
+            <a:schemeClr val="lt1"/>
+          </a:fontRef>
+        </p:style>
+        <p:txBody>
+          <a:bodyPr rtlCol="0" anchor="ctr"/>
+          <a:lstStyle/>
+          <a:p>
+            <a:pPr algn="ctr"/>
+            <a:endParaRPr lang="da-DK"/>
+          </a:p>
+        </p:txBody>
+      </p:sp>
     </p:spTree>
     <p:extLst>
       <p:ext uri="{BB962C8B-B14F-4D97-AF65-F5344CB8AC3E}">
-        <p14:creationId xmlns:p14="http://schemas.microsoft.com/office/powerpoint/2010/main" val="2722539879"/>
+        <p14:creationId xmlns:p14="http://schemas.microsoft.com/office/powerpoint/2010/main" val="3840334006"/>
       </p:ext>
     </p:extLst>
   </p:cSld>
@@ -20006,40 +18985,119 @@
           <a:chExt cx="0" cy="0"/>
         </a:xfrm>
       </p:grpSpPr>
-      <p:pic>
-        <p:nvPicPr>
-          <p:cNvPr id="3" name="Billede 2">
+      <p:sp>
+        <p:nvSpPr>
+          <p:cNvPr id="2" name="Titel 1">
             <a:extLst>
               <a:ext uri="{FF2B5EF4-FFF2-40B4-BE49-F238E27FC236}">
-                <a16:creationId xmlns:a16="http://schemas.microsoft.com/office/drawing/2014/main" id="{DCEF87E4-5C09-465B-AD15-CD3352455263}"/>
+                <a16:creationId xmlns:a16="http://schemas.microsoft.com/office/drawing/2014/main" id="{E7127DB6-3E97-44FB-BC0D-1D55ABD933E2}"/>
               </a:ext>
             </a:extLst>
           </p:cNvPr>
-          <p:cNvPicPr>
-            <a:picLocks noChangeAspect="1"/>
-          </p:cNvPicPr>
-          <p:nvPr/>
-        </p:nvPicPr>
-        <p:blipFill>
-          <a:blip r:embed="rId2"/>
-          <a:stretch>
-            <a:fillRect/>
-          </a:stretch>
-        </p:blipFill>
+          <p:cNvSpPr>
+            <a:spLocks noGrp="1"/>
+          </p:cNvSpPr>
+          <p:nvPr>
+            <p:ph type="title"/>
+          </p:nvPr>
+        </p:nvSpPr>
+        <p:spPr/>
+        <p:txBody>
+          <a:bodyPr/>
+          <a:lstStyle/>
+          <a:p>
+            <a:r>
+              <a:rPr lang="da-DK"/>
+              <a:t>Web App with Domain class</a:t>
+            </a:r>
+          </a:p>
+        </p:txBody>
+      </p:sp>
+      <p:sp>
+        <p:nvSpPr>
+          <p:cNvPr id="3" name="Pladsholder til indhold 2">
+            <a:extLst>
+              <a:ext uri="{FF2B5EF4-FFF2-40B4-BE49-F238E27FC236}">
+                <a16:creationId xmlns:a16="http://schemas.microsoft.com/office/drawing/2014/main" id="{DD8807CE-E4D1-4E30-AABA-DB8BAAF66FD6}"/>
+              </a:ext>
+            </a:extLst>
+          </p:cNvPr>
+          <p:cNvSpPr>
+            <a:spLocks noGrp="1"/>
+          </p:cNvSpPr>
+          <p:nvPr>
+            <p:ph idx="1"/>
+          </p:nvPr>
+        </p:nvSpPr>
         <p:spPr>
           <a:xfrm>
-            <a:off x="0" y="190500"/>
-            <a:ext cx="12192000" cy="6477000"/>
+            <a:off x="838200" y="1825625"/>
+            <a:ext cx="8568267" cy="4351338"/>
           </a:xfrm>
-          <a:prstGeom prst="rect">
-            <a:avLst/>
-          </a:prstGeom>
         </p:spPr>
-      </p:pic>
+        <p:txBody>
+          <a:bodyPr/>
+          <a:lstStyle/>
+          <a:p>
+            <a:pPr marL="514350" indent="-514350">
+              <a:buFont typeface="+mj-lt"/>
+              <a:buAutoNum type="arabicPeriod"/>
+            </a:pPr>
+            <a:r>
+              <a:rPr lang="da-DK"/>
+              <a:t>In the </a:t>
+            </a:r>
+            <a:r>
+              <a:rPr lang="da-DK" b="1"/>
+              <a:t>Pages</a:t>
+            </a:r>
+            <a:r>
+              <a:rPr lang="da-DK"/>
+              <a:t> folder, create a subfolder named </a:t>
+            </a:r>
+            <a:r>
+              <a:rPr lang="da-DK" b="1"/>
+              <a:t>Movies</a:t>
+            </a:r>
+            <a:r>
+              <a:rPr lang="da-DK"/>
+              <a:t> (remember the ”plural s”).</a:t>
+            </a:r>
+          </a:p>
+          <a:p>
+            <a:pPr marL="514350" indent="-514350">
+              <a:buFont typeface="+mj-lt"/>
+              <a:buAutoNum type="arabicPeriod"/>
+            </a:pPr>
+            <a:r>
+              <a:rPr lang="da-DK"/>
+              <a:t>In the </a:t>
+            </a:r>
+            <a:r>
+              <a:rPr lang="da-DK" b="1"/>
+              <a:t>Movies</a:t>
+            </a:r>
+            <a:r>
+              <a:rPr lang="da-DK"/>
+              <a:t> folder, create a new Razor Page named </a:t>
+            </a:r>
+            <a:r>
+              <a:rPr lang="da-DK" b="1"/>
+              <a:t>ShowAll</a:t>
+            </a:r>
+          </a:p>
+          <a:p>
+            <a:pPr marL="0" indent="0">
+              <a:buNone/>
+            </a:pPr>
+            <a:endParaRPr lang="da-DK"/>
+          </a:p>
+        </p:txBody>
+      </p:sp>
     </p:spTree>
     <p:extLst>
       <p:ext uri="{BB962C8B-B14F-4D97-AF65-F5344CB8AC3E}">
-        <p14:creationId xmlns:p14="http://schemas.microsoft.com/office/powerpoint/2010/main" val="1497825001"/>
+        <p14:creationId xmlns:p14="http://schemas.microsoft.com/office/powerpoint/2010/main" val="3783554484"/>
       </p:ext>
     </p:extLst>
   </p:cSld>
@@ -20083,7 +19141,7 @@
           <p:cNvPr id="2" name="Billede 1">
             <a:extLst>
               <a:ext uri="{FF2B5EF4-FFF2-40B4-BE49-F238E27FC236}">
-                <a16:creationId xmlns:a16="http://schemas.microsoft.com/office/drawing/2014/main" id="{4C2320C3-4A51-45F0-B97F-51CCE406B45B}"/>
+                <a16:creationId xmlns:a16="http://schemas.microsoft.com/office/drawing/2014/main" id="{48E0F32E-2D72-44FC-B4E2-AC2BDEABA4E4}"/>
               </a:ext>
             </a:extLst>
           </p:cNvPr>
@@ -20100,18 +19158,70 @@
         </p:blipFill>
         <p:spPr>
           <a:xfrm>
-            <a:off x="0" y="190500"/>
-            <a:ext cx="12192000" cy="6477000"/>
+            <a:off x="3695700" y="397042"/>
+            <a:ext cx="4800600" cy="6063916"/>
           </a:xfrm>
           <a:prstGeom prst="rect">
             <a:avLst/>
           </a:prstGeom>
         </p:spPr>
       </p:pic>
+      <p:sp>
+        <p:nvSpPr>
+          <p:cNvPr id="6" name="Rektangel 5">
+            <a:extLst>
+              <a:ext uri="{FF2B5EF4-FFF2-40B4-BE49-F238E27FC236}">
+                <a16:creationId xmlns:a16="http://schemas.microsoft.com/office/drawing/2014/main" id="{DB2A4A97-2A10-42B7-B5FA-ABC3829B7D19}"/>
+              </a:ext>
+            </a:extLst>
+          </p:cNvPr>
+          <p:cNvSpPr/>
+          <p:nvPr/>
+        </p:nvSpPr>
+        <p:spPr>
+          <a:xfrm>
+            <a:off x="3759200" y="2480732"/>
+            <a:ext cx="3496733" cy="948267"/>
+          </a:xfrm>
+          <a:prstGeom prst="rect">
+            <a:avLst/>
+          </a:prstGeom>
+          <a:noFill/>
+          <a:ln w="38100">
+            <a:solidFill>
+              <a:srgbClr val="FF0000"/>
+            </a:solidFill>
+          </a:ln>
+        </p:spPr>
+        <p:style>
+          <a:lnRef idx="2">
+            <a:schemeClr val="accent1">
+              <a:shade val="50000"/>
+            </a:schemeClr>
+          </a:lnRef>
+          <a:fillRef idx="1">
+            <a:schemeClr val="accent1"/>
+          </a:fillRef>
+          <a:effectRef idx="0">
+            <a:schemeClr val="accent1"/>
+          </a:effectRef>
+          <a:fontRef idx="minor">
+            <a:schemeClr val="lt1"/>
+          </a:fontRef>
+        </p:style>
+        <p:txBody>
+          <a:bodyPr rtlCol="0" anchor="ctr"/>
+          <a:lstStyle/>
+          <a:p>
+            <a:pPr algn="ctr"/>
+            <a:endParaRPr lang="da-DK"/>
+          </a:p>
+        </p:txBody>
+      </p:sp>
     </p:spTree>
     <p:extLst>
       <p:ext uri="{BB962C8B-B14F-4D97-AF65-F5344CB8AC3E}">
-        <p14:creationId xmlns:p14="http://schemas.microsoft.com/office/powerpoint/2010/main" val="2090465150"/>
+        <p14:creationId xmlns:p14="http://schemas.microsoft.com/office/powerpoint/2010/main" val="2040928082"/>
       </p:ext>
     </p:extLst>
   </p:cSld>
@@ -20152,10 +19262,10 @@
       </p:grpSpPr>
       <p:pic>
         <p:nvPicPr>
-          <p:cNvPr id="4" name="Billede 3">
+          <p:cNvPr id="2" name="Billede 1">
             <a:extLst>
               <a:ext uri="{FF2B5EF4-FFF2-40B4-BE49-F238E27FC236}">
-                <a16:creationId xmlns:a16="http://schemas.microsoft.com/office/drawing/2014/main" id="{7D096D4F-3BC1-4ABA-8A3C-F11724B96861}"/>
+                <a16:creationId xmlns:a16="http://schemas.microsoft.com/office/drawing/2014/main" id="{10DEFF92-FF06-4549-90EE-EF0DC17B2333}"/>
               </a:ext>
             </a:extLst>
           </p:cNvPr>
@@ -20172,122 +19282,187 @@
         </p:blipFill>
         <p:spPr>
           <a:xfrm>
-            <a:off x="0" y="190500"/>
-            <a:ext cx="12192000" cy="6477000"/>
+            <a:off x="316694" y="1651434"/>
+            <a:ext cx="5183530" cy="3555131"/>
           </a:xfrm>
           <a:prstGeom prst="rect">
             <a:avLst/>
           </a:prstGeom>
         </p:spPr>
       </p:pic>
-      <p:sp>
-        <p:nvSpPr>
-          <p:cNvPr id="5" name="Rektangel 4">
+      <p:pic>
+        <p:nvPicPr>
+          <p:cNvPr id="5" name="Billede 4">
             <a:extLst>
               <a:ext uri="{FF2B5EF4-FFF2-40B4-BE49-F238E27FC236}">
-                <a16:creationId xmlns:a16="http://schemas.microsoft.com/office/drawing/2014/main" id="{B33D5780-DC5C-4C7A-BEB8-1FC643AE3A21}"/>
+                <a16:creationId xmlns:a16="http://schemas.microsoft.com/office/drawing/2014/main" id="{81BD6076-1ED1-4F6A-B64D-9F89CBC20B76}"/>
               </a:ext>
             </a:extLst>
           </p:cNvPr>
-          <p:cNvSpPr/>
+          <p:cNvPicPr>
+            <a:picLocks noChangeAspect="1"/>
+          </p:cNvPicPr>
           <p:nvPr/>
-        </p:nvSpPr>
+        </p:nvPicPr>
+        <p:blipFill>
+          <a:blip r:embed="rId3"/>
+          <a:stretch>
+            <a:fillRect/>
+          </a:stretch>
+        </p:blipFill>
         <p:spPr>
           <a:xfrm>
-            <a:off x="4518211" y="3818965"/>
-            <a:ext cx="6974542" cy="537881"/>
+            <a:off x="6530199" y="675754"/>
+            <a:ext cx="5094534" cy="5506491"/>
           </a:xfrm>
           <a:prstGeom prst="rect">
             <a:avLst/>
           </a:prstGeom>
-          <a:noFill/>
-          <a:ln w="38100">
-            <a:solidFill>
-              <a:srgbClr val="FF0000"/>
-            </a:solidFill>
-          </a:ln>
         </p:spPr>
-        <p:style>
-          <a:lnRef idx="2">
-            <a:schemeClr val="accent1">
-              <a:shade val="50000"/>
-            </a:schemeClr>
-          </a:lnRef>
-          <a:fillRef idx="1">
-            <a:schemeClr val="accent1"/>
-          </a:fillRef>
-          <a:effectRef idx="0">
-            <a:schemeClr val="accent1"/>
-          </a:effectRef>
-          <a:fontRef idx="minor">
-            <a:schemeClr val="lt1"/>
-          </a:fontRef>
-        </p:style>
+      </p:pic>
+    </p:spTree>
+    <p:extLst>
+      <p:ext uri="{BB962C8B-B14F-4D97-AF65-F5344CB8AC3E}">
+        <p14:creationId xmlns:p14="http://schemas.microsoft.com/office/powerpoint/2010/main" val="2577874640"/>
+      </p:ext>
+    </p:extLst>
+  </p:cSld>
+  <p:clrMapOvr>
+    <a:masterClrMapping/>
+  </p:clrMapOvr>
+  <mc:AlternateContent xmlns:mc="http://schemas.openxmlformats.org/markup-compatibility/2006" xmlns:p14="http://schemas.microsoft.com/office/powerpoint/2010/main">
+    <mc:Choice Requires="p14">
+      <p:transition spd="med" p14:dur="700">
+        <p:fade/>
+      </p:transition>
+    </mc:Choice>
+    <mc:Fallback xmlns="">
+      <p:transition spd="med">
+        <p:fade/>
+      </p:transition>
+    </mc:Fallback>
+  </mc:AlternateContent>
+</p:sld>
+</file>
+
+<file path=ppt/slides/slide59.xml><?xml version="1.0" encoding="utf-8"?>
+<p:sld xmlns:a="http://schemas.openxmlformats.org/drawingml/2006/main" xmlns:r="http://schemas.openxmlformats.org/officeDocument/2006/relationships" xmlns:p="http://schemas.openxmlformats.org/presentationml/2006/main">
+  <p:cSld>
+    <p:spTree>
+      <p:nvGrpSpPr>
+        <p:cNvPr id="1" name=""/>
+        <p:cNvGrpSpPr/>
+        <p:nvPr/>
+      </p:nvGrpSpPr>
+      <p:grpSpPr>
+        <a:xfrm>
+          <a:off x="0" y="0"/>
+          <a:ext cx="0" cy="0"/>
+          <a:chOff x="0" y="0"/>
+          <a:chExt cx="0" cy="0"/>
+        </a:xfrm>
+      </p:grpSpPr>
+      <p:sp>
+        <p:nvSpPr>
+          <p:cNvPr id="2" name="Titel 1">
+            <a:extLst>
+              <a:ext uri="{FF2B5EF4-FFF2-40B4-BE49-F238E27FC236}">
+                <a16:creationId xmlns:a16="http://schemas.microsoft.com/office/drawing/2014/main" id="{E7127DB6-3E97-44FB-BC0D-1D55ABD933E2}"/>
+              </a:ext>
+            </a:extLst>
+          </p:cNvPr>
+          <p:cNvSpPr>
+            <a:spLocks noGrp="1"/>
+          </p:cNvSpPr>
+          <p:nvPr>
+            <p:ph type="title"/>
+          </p:nvPr>
+        </p:nvSpPr>
+        <p:spPr/>
         <p:txBody>
-          <a:bodyPr rtlCol="0" anchor="ctr"/>
+          <a:bodyPr/>
           <a:lstStyle/>
           <a:p>
-            <a:pPr algn="ctr"/>
-            <a:endParaRPr lang="da-DK"/>
+            <a:r>
+              <a:rPr lang="da-DK"/>
+              <a:t>Web App with Domain class</a:t>
+            </a:r>
           </a:p>
         </p:txBody>
       </p:sp>
       <p:sp>
         <p:nvSpPr>
-          <p:cNvPr id="6" name="Rektangel 5">
+          <p:cNvPr id="3" name="Pladsholder til indhold 2">
             <a:extLst>
               <a:ext uri="{FF2B5EF4-FFF2-40B4-BE49-F238E27FC236}">
-                <a16:creationId xmlns:a16="http://schemas.microsoft.com/office/drawing/2014/main" id="{78E03A6A-7BB8-46FC-8F0A-733C1790633E}"/>
+                <a16:creationId xmlns:a16="http://schemas.microsoft.com/office/drawing/2014/main" id="{DD8807CE-E4D1-4E30-AABA-DB8BAAF66FD6}"/>
               </a:ext>
             </a:extLst>
           </p:cNvPr>
-          <p:cNvSpPr/>
-          <p:nvPr/>
+          <p:cNvSpPr>
+            <a:spLocks noGrp="1"/>
+          </p:cNvSpPr>
+          <p:nvPr>
+            <p:ph idx="1"/>
+          </p:nvPr>
         </p:nvSpPr>
         <p:spPr>
           <a:xfrm>
-            <a:off x="2026023" y="645458"/>
-            <a:ext cx="1532965" cy="358589"/>
+            <a:off x="838200" y="1825625"/>
+            <a:ext cx="9262533" cy="4351338"/>
           </a:xfrm>
-          <a:prstGeom prst="rect">
-            <a:avLst/>
-          </a:prstGeom>
-          <a:noFill/>
-          <a:ln w="38100">
-            <a:solidFill>
-              <a:srgbClr val="FF0000"/>
-            </a:solidFill>
-          </a:ln>
         </p:spPr>
-        <p:style>
-          <a:lnRef idx="2">
-            <a:schemeClr val="accent1">
-              <a:shade val="50000"/>
-            </a:schemeClr>
-          </a:lnRef>
-          <a:fillRef idx="1">
-            <a:schemeClr val="accent1"/>
-          </a:fillRef>
-          <a:effectRef idx="0">
-            <a:schemeClr val="accent1"/>
-          </a:effectRef>
-          <a:fontRef idx="minor">
-            <a:schemeClr val="lt1"/>
-          </a:fontRef>
-        </p:style>
         <p:txBody>
-          <a:bodyPr rtlCol="0" anchor="ctr"/>
+          <a:bodyPr/>
           <a:lstStyle/>
           <a:p>
-            <a:pPr algn="ctr"/>
-            <a:endParaRPr lang="da-DK"/>
+            <a:pPr marL="514350" indent="-514350">
+              <a:buFont typeface="+mj-lt"/>
+              <a:buAutoNum type="arabicPeriod"/>
+            </a:pPr>
+            <a:r>
+              <a:rPr lang="da-DK"/>
+              <a:t>In the </a:t>
+            </a:r>
+            <a:r>
+              <a:rPr lang="da-DK" b="1"/>
+              <a:t>Pages/Shared</a:t>
+            </a:r>
+            <a:r>
+              <a:rPr lang="da-DK"/>
+              <a:t> folder, open the </a:t>
+            </a:r>
+            <a:r>
+              <a:rPr lang="da-DK" b="1"/>
+              <a:t>_Layout.cshtml</a:t>
+            </a:r>
+            <a:r>
+              <a:rPr lang="da-DK"/>
+              <a:t> file and add a new </a:t>
+            </a:r>
+            <a:r>
+              <a:rPr lang="da-DK" b="1"/>
+              <a:t>&lt;li&gt;</a:t>
+            </a:r>
+            <a:r>
+              <a:rPr lang="da-DK"/>
+              <a:t> tag under the existing </a:t>
+            </a:r>
+            <a:r>
+              <a:rPr lang="da-DK" b="1"/>
+              <a:t>&lt;li&gt;</a:t>
+            </a:r>
+            <a:r>
+              <a:rPr lang="da-DK"/>
+              <a:t> tags, in order to add a new item to the navigation bar.</a:t>
+            </a:r>
           </a:p>
         </p:txBody>
       </p:sp>
     </p:spTree>
     <p:extLst>
       <p:ext uri="{BB962C8B-B14F-4D97-AF65-F5344CB8AC3E}">
-        <p14:creationId xmlns:p14="http://schemas.microsoft.com/office/powerpoint/2010/main" val="1653019903"/>
+        <p14:creationId xmlns:p14="http://schemas.microsoft.com/office/powerpoint/2010/main" val="2730171460"/>
       </p:ext>
     </p:extLst>
   </p:cSld>
@@ -20536,6 +19711,647 @@
     <p:extLst>
       <p:ext uri="{BB962C8B-B14F-4D97-AF65-F5344CB8AC3E}">
         <p14:creationId xmlns:p14="http://schemas.microsoft.com/office/powerpoint/2010/main" val="2586035460"/>
+      </p:ext>
+    </p:extLst>
+  </p:cSld>
+  <p:clrMapOvr>
+    <a:masterClrMapping/>
+  </p:clrMapOvr>
+  <mc:AlternateContent xmlns:mc="http://schemas.openxmlformats.org/markup-compatibility/2006" xmlns:p14="http://schemas.microsoft.com/office/powerpoint/2010/main">
+    <mc:Choice Requires="p14">
+      <p:transition spd="med" p14:dur="700">
+        <p:fade/>
+      </p:transition>
+    </mc:Choice>
+    <mc:Fallback xmlns="">
+      <p:transition spd="med">
+        <p:fade/>
+      </p:transition>
+    </mc:Fallback>
+  </mc:AlternateContent>
+</p:sld>
+</file>
+
+<file path=ppt/slides/slide60.xml><?xml version="1.0" encoding="utf-8"?>
+<p:sld xmlns:a="http://schemas.openxmlformats.org/drawingml/2006/main" xmlns:r="http://schemas.openxmlformats.org/officeDocument/2006/relationships" xmlns:p="http://schemas.openxmlformats.org/presentationml/2006/main">
+  <p:cSld>
+    <p:spTree>
+      <p:nvGrpSpPr>
+        <p:cNvPr id="1" name=""/>
+        <p:cNvGrpSpPr/>
+        <p:nvPr/>
+      </p:nvGrpSpPr>
+      <p:grpSpPr>
+        <a:xfrm>
+          <a:off x="0" y="0"/>
+          <a:ext cx="0" cy="0"/>
+          <a:chOff x="0" y="0"/>
+          <a:chExt cx="0" cy="0"/>
+        </a:xfrm>
+      </p:grpSpPr>
+      <p:pic>
+        <p:nvPicPr>
+          <p:cNvPr id="3" name="Billede 2">
+            <a:extLst>
+              <a:ext uri="{FF2B5EF4-FFF2-40B4-BE49-F238E27FC236}">
+                <a16:creationId xmlns:a16="http://schemas.microsoft.com/office/drawing/2014/main" id="{89A73A40-90AD-4F52-880C-18F73CDEF6E8}"/>
+              </a:ext>
+            </a:extLst>
+          </p:cNvPr>
+          <p:cNvPicPr>
+            <a:picLocks noChangeAspect="1"/>
+          </p:cNvPicPr>
+          <p:nvPr/>
+        </p:nvPicPr>
+        <p:blipFill>
+          <a:blip r:embed="rId2"/>
+          <a:stretch>
+            <a:fillRect/>
+          </a:stretch>
+        </p:blipFill>
+        <p:spPr>
+          <a:xfrm>
+            <a:off x="3886200" y="670138"/>
+            <a:ext cx="4419599" cy="5517721"/>
+          </a:xfrm>
+          <a:prstGeom prst="rect">
+            <a:avLst/>
+          </a:prstGeom>
+        </p:spPr>
+      </p:pic>
+      <p:sp>
+        <p:nvSpPr>
+          <p:cNvPr id="6" name="Rektangel 5">
+            <a:extLst>
+              <a:ext uri="{FF2B5EF4-FFF2-40B4-BE49-F238E27FC236}">
+                <a16:creationId xmlns:a16="http://schemas.microsoft.com/office/drawing/2014/main" id="{DB2A4A97-2A10-42B7-B5FA-ABC3829B7D19}"/>
+              </a:ext>
+            </a:extLst>
+          </p:cNvPr>
+          <p:cNvSpPr/>
+          <p:nvPr/>
+        </p:nvSpPr>
+        <p:spPr>
+          <a:xfrm>
+            <a:off x="4385733" y="3014133"/>
+            <a:ext cx="2269067" cy="524933"/>
+          </a:xfrm>
+          <a:prstGeom prst="rect">
+            <a:avLst/>
+          </a:prstGeom>
+          <a:noFill/>
+          <a:ln w="38100">
+            <a:solidFill>
+              <a:srgbClr val="FF0000"/>
+            </a:solidFill>
+          </a:ln>
+        </p:spPr>
+        <p:style>
+          <a:lnRef idx="2">
+            <a:schemeClr val="accent1">
+              <a:shade val="50000"/>
+            </a:schemeClr>
+          </a:lnRef>
+          <a:fillRef idx="1">
+            <a:schemeClr val="accent1"/>
+          </a:fillRef>
+          <a:effectRef idx="0">
+            <a:schemeClr val="accent1"/>
+          </a:effectRef>
+          <a:fontRef idx="minor">
+            <a:schemeClr val="lt1"/>
+          </a:fontRef>
+        </p:style>
+        <p:txBody>
+          <a:bodyPr rtlCol="0" anchor="ctr"/>
+          <a:lstStyle/>
+          <a:p>
+            <a:pPr algn="ctr"/>
+            <a:endParaRPr lang="da-DK"/>
+          </a:p>
+        </p:txBody>
+      </p:sp>
+    </p:spTree>
+    <p:extLst>
+      <p:ext uri="{BB962C8B-B14F-4D97-AF65-F5344CB8AC3E}">
+        <p14:creationId xmlns:p14="http://schemas.microsoft.com/office/powerpoint/2010/main" val="3408162446"/>
+      </p:ext>
+    </p:extLst>
+  </p:cSld>
+  <p:clrMapOvr>
+    <a:masterClrMapping/>
+  </p:clrMapOvr>
+  <mc:AlternateContent xmlns:mc="http://schemas.openxmlformats.org/markup-compatibility/2006" xmlns:p14="http://schemas.microsoft.com/office/powerpoint/2010/main">
+    <mc:Choice Requires="p14">
+      <p:transition spd="med" p14:dur="700">
+        <p:fade/>
+      </p:transition>
+    </mc:Choice>
+    <mc:Fallback xmlns="">
+      <p:transition spd="med">
+        <p:fade/>
+      </p:transition>
+    </mc:Fallback>
+  </mc:AlternateContent>
+</p:sld>
+</file>
+
+<file path=ppt/slides/slide61.xml><?xml version="1.0" encoding="utf-8"?>
+<p:sld xmlns:a="http://schemas.openxmlformats.org/drawingml/2006/main" xmlns:r="http://schemas.openxmlformats.org/officeDocument/2006/relationships" xmlns:p="http://schemas.openxmlformats.org/presentationml/2006/main">
+  <p:cSld>
+    <p:spTree>
+      <p:nvGrpSpPr>
+        <p:cNvPr id="1" name=""/>
+        <p:cNvGrpSpPr/>
+        <p:nvPr/>
+      </p:nvGrpSpPr>
+      <p:grpSpPr>
+        <a:xfrm>
+          <a:off x="0" y="0"/>
+          <a:ext cx="0" cy="0"/>
+          <a:chOff x="0" y="0"/>
+          <a:chExt cx="0" cy="0"/>
+        </a:xfrm>
+      </p:grpSpPr>
+      <p:pic>
+        <p:nvPicPr>
+          <p:cNvPr id="3" name="Billede 2">
+            <a:extLst>
+              <a:ext uri="{FF2B5EF4-FFF2-40B4-BE49-F238E27FC236}">
+                <a16:creationId xmlns:a16="http://schemas.microsoft.com/office/drawing/2014/main" id="{5E311343-5C4A-429E-8CBF-F92020010EC3}"/>
+              </a:ext>
+            </a:extLst>
+          </p:cNvPr>
+          <p:cNvPicPr>
+            <a:picLocks noChangeAspect="1"/>
+          </p:cNvPicPr>
+          <p:nvPr/>
+        </p:nvPicPr>
+        <p:blipFill>
+          <a:blip r:embed="rId2"/>
+          <a:stretch>
+            <a:fillRect/>
+          </a:stretch>
+        </p:blipFill>
+        <p:spPr>
+          <a:xfrm>
+            <a:off x="2614126" y="2452551"/>
+            <a:ext cx="6963747" cy="1952898"/>
+          </a:xfrm>
+          <a:prstGeom prst="rect">
+            <a:avLst/>
+          </a:prstGeom>
+        </p:spPr>
+      </p:pic>
+      <p:sp>
+        <p:nvSpPr>
+          <p:cNvPr id="6" name="Rektangel 5">
+            <a:extLst>
+              <a:ext uri="{FF2B5EF4-FFF2-40B4-BE49-F238E27FC236}">
+                <a16:creationId xmlns:a16="http://schemas.microsoft.com/office/drawing/2014/main" id="{8C263372-EA77-45A1-80AE-69A717D7465F}"/>
+              </a:ext>
+            </a:extLst>
+          </p:cNvPr>
+          <p:cNvSpPr/>
+          <p:nvPr/>
+        </p:nvSpPr>
+        <p:spPr>
+          <a:xfrm>
+            <a:off x="3191933" y="3632200"/>
+            <a:ext cx="6290734" cy="524933"/>
+          </a:xfrm>
+          <a:prstGeom prst="rect">
+            <a:avLst/>
+          </a:prstGeom>
+          <a:noFill/>
+          <a:ln w="38100">
+            <a:solidFill>
+              <a:srgbClr val="FF0000"/>
+            </a:solidFill>
+          </a:ln>
+        </p:spPr>
+        <p:style>
+          <a:lnRef idx="2">
+            <a:schemeClr val="accent1">
+              <a:shade val="50000"/>
+            </a:schemeClr>
+          </a:lnRef>
+          <a:fillRef idx="1">
+            <a:schemeClr val="accent1"/>
+          </a:fillRef>
+          <a:effectRef idx="0">
+            <a:schemeClr val="accent1"/>
+          </a:effectRef>
+          <a:fontRef idx="minor">
+            <a:schemeClr val="lt1"/>
+          </a:fontRef>
+        </p:style>
+        <p:txBody>
+          <a:bodyPr rtlCol="0" anchor="ctr"/>
+          <a:lstStyle/>
+          <a:p>
+            <a:pPr algn="ctr"/>
+            <a:endParaRPr lang="da-DK"/>
+          </a:p>
+        </p:txBody>
+      </p:sp>
+    </p:spTree>
+    <p:extLst>
+      <p:ext uri="{BB962C8B-B14F-4D97-AF65-F5344CB8AC3E}">
+        <p14:creationId xmlns:p14="http://schemas.microsoft.com/office/powerpoint/2010/main" val="325540710"/>
+      </p:ext>
+    </p:extLst>
+  </p:cSld>
+  <p:clrMapOvr>
+    <a:masterClrMapping/>
+  </p:clrMapOvr>
+  <mc:AlternateContent xmlns:mc="http://schemas.openxmlformats.org/markup-compatibility/2006" xmlns:p14="http://schemas.microsoft.com/office/powerpoint/2010/main">
+    <mc:Choice Requires="p14">
+      <p:transition spd="med" p14:dur="700">
+        <p:fade/>
+      </p:transition>
+    </mc:Choice>
+    <mc:Fallback xmlns="">
+      <p:transition spd="med">
+        <p:fade/>
+      </p:transition>
+    </mc:Fallback>
+  </mc:AlternateContent>
+</p:sld>
+</file>
+
+<file path=ppt/slides/slide62.xml><?xml version="1.0" encoding="utf-8"?>
+<p:sld xmlns:a="http://schemas.openxmlformats.org/drawingml/2006/main" xmlns:r="http://schemas.openxmlformats.org/officeDocument/2006/relationships" xmlns:p="http://schemas.openxmlformats.org/presentationml/2006/main">
+  <p:cSld>
+    <p:spTree>
+      <p:nvGrpSpPr>
+        <p:cNvPr id="1" name=""/>
+        <p:cNvGrpSpPr/>
+        <p:nvPr/>
+      </p:nvGrpSpPr>
+      <p:grpSpPr>
+        <a:xfrm>
+          <a:off x="0" y="0"/>
+          <a:ext cx="0" cy="0"/>
+          <a:chOff x="0" y="0"/>
+          <a:chExt cx="0" cy="0"/>
+        </a:xfrm>
+      </p:grpSpPr>
+      <p:sp>
+        <p:nvSpPr>
+          <p:cNvPr id="2" name="Titel 1">
+            <a:extLst>
+              <a:ext uri="{FF2B5EF4-FFF2-40B4-BE49-F238E27FC236}">
+                <a16:creationId xmlns:a16="http://schemas.microsoft.com/office/drawing/2014/main" id="{DAF692E9-FDEE-4050-89C2-24BA0EC135B6}"/>
+              </a:ext>
+            </a:extLst>
+          </p:cNvPr>
+          <p:cNvSpPr>
+            <a:spLocks noGrp="1"/>
+          </p:cNvSpPr>
+          <p:nvPr>
+            <p:ph type="title"/>
+          </p:nvPr>
+        </p:nvSpPr>
+        <p:spPr/>
+        <p:txBody>
+          <a:bodyPr/>
+          <a:lstStyle/>
+          <a:p>
+            <a:r>
+              <a:rPr lang="da-DK" dirty="0"/>
+              <a:t>Web App with Domain Class</a:t>
+            </a:r>
+          </a:p>
+        </p:txBody>
+      </p:sp>
+      <p:sp>
+        <p:nvSpPr>
+          <p:cNvPr id="3" name="Pladsholder til indhold 2">
+            <a:extLst>
+              <a:ext uri="{FF2B5EF4-FFF2-40B4-BE49-F238E27FC236}">
+                <a16:creationId xmlns:a16="http://schemas.microsoft.com/office/drawing/2014/main" id="{155D4275-2991-432A-ACBA-90FA8552B3BE}"/>
+              </a:ext>
+            </a:extLst>
+          </p:cNvPr>
+          <p:cNvSpPr>
+            <a:spLocks noGrp="1"/>
+          </p:cNvSpPr>
+          <p:nvPr>
+            <p:ph idx="1"/>
+          </p:nvPr>
+        </p:nvSpPr>
+        <p:spPr/>
+        <p:txBody>
+          <a:bodyPr/>
+          <a:lstStyle/>
+          <a:p>
+            <a:r>
+              <a:rPr lang="da-DK" dirty="0" err="1"/>
+              <a:t>Recommendations</a:t>
+            </a:r>
+            <a:endParaRPr lang="da-DK" dirty="0"/>
+          </a:p>
+          <a:p>
+            <a:pPr lvl="1"/>
+            <a:r>
+              <a:rPr lang="da-DK" sz="2000" dirty="0" err="1"/>
+              <a:t>Add</a:t>
+            </a:r>
+            <a:r>
+              <a:rPr lang="da-DK" sz="2000" dirty="0"/>
+              <a:t> top-</a:t>
+            </a:r>
+            <a:r>
+              <a:rPr lang="da-DK" sz="2000" dirty="0" err="1"/>
+              <a:t>level</a:t>
+            </a:r>
+            <a:r>
+              <a:rPr lang="da-DK" sz="2000" dirty="0"/>
+              <a:t> folder </a:t>
+            </a:r>
+            <a:r>
+              <a:rPr lang="da-DK" sz="2000" b="1" dirty="0"/>
+              <a:t>Models</a:t>
+            </a:r>
+            <a:r>
+              <a:rPr lang="da-DK" sz="2000" dirty="0"/>
+              <a:t> to </a:t>
+            </a:r>
+            <a:r>
+              <a:rPr lang="da-DK" sz="2000" dirty="0" err="1"/>
+              <a:t>project</a:t>
+            </a:r>
+            <a:endParaRPr lang="da-DK" sz="2000" dirty="0"/>
+          </a:p>
+          <a:p>
+            <a:pPr lvl="1"/>
+            <a:r>
+              <a:rPr lang="da-DK" sz="2000" dirty="0" err="1"/>
+              <a:t>Add</a:t>
+            </a:r>
+            <a:r>
+              <a:rPr lang="da-DK" sz="2000" dirty="0"/>
+              <a:t> domain class definitions to this folder</a:t>
+            </a:r>
+          </a:p>
+          <a:p>
+            <a:pPr lvl="1"/>
+            <a:r>
+              <a:rPr lang="da-DK" sz="2000" b="1" dirty="0">
+                <a:solidFill>
+                  <a:srgbClr val="FF0000"/>
+                </a:solidFill>
+              </a:rPr>
+              <a:t>NB</a:t>
+            </a:r>
+            <a:r>
+              <a:rPr lang="da-DK" sz="2000" dirty="0"/>
+              <a:t>: All domain </a:t>
+            </a:r>
+            <a:r>
+              <a:rPr lang="da-DK" sz="2000" dirty="0" err="1"/>
+              <a:t>classes</a:t>
+            </a:r>
+            <a:r>
+              <a:rPr lang="da-DK" sz="2000" dirty="0"/>
+              <a:t> </a:t>
+            </a:r>
+            <a:r>
+              <a:rPr lang="da-DK" sz="2000" u="sng" dirty="0"/>
+              <a:t>must</a:t>
+            </a:r>
+            <a:r>
+              <a:rPr lang="da-DK" sz="2000" dirty="0"/>
+              <a:t> have a default constructor (i.e. no parameters)</a:t>
+            </a:r>
+          </a:p>
+          <a:p>
+            <a:pPr lvl="1"/>
+            <a:r>
+              <a:rPr lang="da-DK" sz="2000" dirty="0"/>
+              <a:t>Under the </a:t>
+            </a:r>
+            <a:r>
+              <a:rPr lang="da-DK" sz="2000" b="1" dirty="0"/>
+              <a:t>Pages</a:t>
+            </a:r>
+            <a:r>
+              <a:rPr lang="da-DK" sz="2000" dirty="0"/>
+              <a:t> folder, </a:t>
+            </a:r>
+            <a:r>
+              <a:rPr lang="da-DK" sz="2000" dirty="0" err="1"/>
+              <a:t>add</a:t>
+            </a:r>
+            <a:r>
+              <a:rPr lang="da-DK" sz="2000" dirty="0"/>
+              <a:t> </a:t>
+            </a:r>
+            <a:r>
+              <a:rPr lang="da-DK" sz="2000" dirty="0" err="1"/>
+              <a:t>one</a:t>
+            </a:r>
+            <a:r>
+              <a:rPr lang="da-DK" sz="2000" dirty="0"/>
+              <a:t> subfolder for </a:t>
+            </a:r>
+            <a:r>
+              <a:rPr lang="da-DK" sz="2000" dirty="0" err="1"/>
+              <a:t>each</a:t>
+            </a:r>
+            <a:r>
+              <a:rPr lang="da-DK" sz="2000" dirty="0"/>
+              <a:t> domain class</a:t>
+            </a:r>
+          </a:p>
+          <a:p>
+            <a:pPr lvl="1"/>
+            <a:r>
+              <a:rPr lang="da-DK" sz="2000" dirty="0"/>
+              <a:t>Give </a:t>
+            </a:r>
+            <a:r>
+              <a:rPr lang="da-DK" sz="2000" dirty="0" err="1"/>
+              <a:t>each</a:t>
+            </a:r>
+            <a:r>
+              <a:rPr lang="da-DK" sz="2000" dirty="0"/>
+              <a:t> subfolder the same </a:t>
+            </a:r>
+            <a:r>
+              <a:rPr lang="da-DK" sz="2000" dirty="0" err="1"/>
+              <a:t>name</a:t>
+            </a:r>
+            <a:r>
+              <a:rPr lang="da-DK" sz="2000" dirty="0"/>
+              <a:t> as the </a:t>
+            </a:r>
+            <a:r>
+              <a:rPr lang="da-DK" sz="2000"/>
+              <a:t>domain class plus a ”plural s”, i.e. for a class </a:t>
+            </a:r>
+            <a:r>
+              <a:rPr lang="da-DK" sz="2000" b="1"/>
+              <a:t>Product</a:t>
+            </a:r>
+            <a:r>
+              <a:rPr lang="da-DK" sz="2000"/>
+              <a:t> make a folder named </a:t>
+            </a:r>
+            <a:r>
+              <a:rPr lang="da-DK" sz="2000" b="1"/>
+              <a:t>Products</a:t>
+            </a:r>
+            <a:r>
+              <a:rPr lang="da-DK" sz="2000"/>
+              <a:t>.</a:t>
+            </a:r>
+            <a:endParaRPr lang="da-DK" sz="2000" dirty="0"/>
+          </a:p>
+          <a:p>
+            <a:pPr lvl="1"/>
+            <a:r>
+              <a:rPr lang="da-DK" sz="2000" dirty="0" err="1"/>
+              <a:t>Add</a:t>
+            </a:r>
+            <a:r>
+              <a:rPr lang="da-DK" sz="2000" dirty="0"/>
+              <a:t> all Pages </a:t>
+            </a:r>
+            <a:r>
+              <a:rPr lang="da-DK" sz="2000" dirty="0" err="1"/>
+              <a:t>relating</a:t>
+            </a:r>
+            <a:r>
+              <a:rPr lang="da-DK" sz="2000" dirty="0"/>
+              <a:t> to this domain class to this subfolder</a:t>
+            </a:r>
+          </a:p>
+          <a:p>
+            <a:pPr lvl="1"/>
+            <a:r>
+              <a:rPr lang="da-DK" sz="2000" dirty="0" err="1"/>
+              <a:t>Add</a:t>
+            </a:r>
+            <a:r>
+              <a:rPr lang="da-DK" sz="2000" dirty="0"/>
+              <a:t> top-</a:t>
+            </a:r>
+            <a:r>
+              <a:rPr lang="da-DK" sz="2000" dirty="0" err="1"/>
+              <a:t>level</a:t>
+            </a:r>
+            <a:r>
+              <a:rPr lang="da-DK" sz="2000" dirty="0"/>
+              <a:t> folder </a:t>
+            </a:r>
+            <a:r>
+              <a:rPr lang="da-DK" sz="2000" b="1" dirty="0"/>
+              <a:t>Services</a:t>
+            </a:r>
+            <a:r>
+              <a:rPr lang="da-DK" sz="2000" dirty="0"/>
+              <a:t> to </a:t>
+            </a:r>
+            <a:r>
+              <a:rPr lang="da-DK" sz="2000" dirty="0" err="1"/>
+              <a:t>project</a:t>
+            </a:r>
+            <a:endParaRPr lang="da-DK" sz="2000" dirty="0"/>
+          </a:p>
+          <a:p>
+            <a:pPr lvl="1"/>
+            <a:r>
+              <a:rPr lang="da-DK" sz="2000" dirty="0" err="1"/>
+              <a:t>Add</a:t>
+            </a:r>
+            <a:r>
+              <a:rPr lang="da-DK" sz="2000" dirty="0"/>
+              <a:t> all service interfaces/</a:t>
+            </a:r>
+            <a:r>
+              <a:rPr lang="da-DK" sz="2000" dirty="0" err="1"/>
+              <a:t>classes</a:t>
+            </a:r>
+            <a:r>
+              <a:rPr lang="da-DK" sz="2000" dirty="0"/>
+              <a:t> to this folder (</a:t>
+            </a:r>
+            <a:r>
+              <a:rPr lang="da-DK" sz="2000" dirty="0" err="1"/>
+              <a:t>add</a:t>
+            </a:r>
+            <a:r>
+              <a:rPr lang="da-DK" sz="2000" dirty="0"/>
+              <a:t> subfolders </a:t>
+            </a:r>
+            <a:r>
+              <a:rPr lang="da-DK" sz="2000" dirty="0" err="1"/>
+              <a:t>if</a:t>
+            </a:r>
+            <a:r>
+              <a:rPr lang="da-DK" sz="2000" dirty="0"/>
+              <a:t> </a:t>
+            </a:r>
+            <a:r>
+              <a:rPr lang="da-DK" sz="2000" err="1"/>
+              <a:t>needed</a:t>
+            </a:r>
+            <a:r>
+              <a:rPr lang="da-DK" sz="2000"/>
+              <a:t>)</a:t>
+            </a:r>
+          </a:p>
+          <a:p>
+            <a:pPr lvl="1"/>
+            <a:r>
+              <a:rPr lang="da-DK" sz="2000"/>
+              <a:t>Register all services in </a:t>
+            </a:r>
+            <a:r>
+              <a:rPr lang="da-DK" sz="2000" b="1"/>
+              <a:t>Program.cs</a:t>
+            </a:r>
+            <a:endParaRPr lang="da-DK" sz="2000" b="1" dirty="0"/>
+          </a:p>
+          <a:p>
+            <a:pPr lvl="1"/>
+            <a:r>
+              <a:rPr lang="da-DK" sz="2000" b="1" dirty="0">
+                <a:solidFill>
+                  <a:srgbClr val="FF0000"/>
+                </a:solidFill>
+              </a:rPr>
+              <a:t>NB</a:t>
+            </a:r>
+            <a:r>
+              <a:rPr lang="da-DK" sz="2000" dirty="0"/>
+              <a:t>: Be </a:t>
+            </a:r>
+            <a:r>
+              <a:rPr lang="da-DK" sz="2000" dirty="0" err="1"/>
+              <a:t>aware</a:t>
+            </a:r>
+            <a:r>
+              <a:rPr lang="da-DK" sz="2000" dirty="0"/>
+              <a:t> of </a:t>
+            </a:r>
+            <a:r>
+              <a:rPr lang="da-DK" sz="2000" b="1" dirty="0" err="1"/>
+              <a:t>namespaces</a:t>
+            </a:r>
+            <a:r>
+              <a:rPr lang="da-DK" sz="2000" dirty="0"/>
+              <a:t>!</a:t>
+            </a:r>
+          </a:p>
+        </p:txBody>
+      </p:sp>
+    </p:spTree>
+    <p:extLst>
+      <p:ext uri="{BB962C8B-B14F-4D97-AF65-F5344CB8AC3E}">
+        <p14:creationId xmlns:p14="http://schemas.microsoft.com/office/powerpoint/2010/main" val="651855365"/>
       </p:ext>
     </p:extLst>
   </p:cSld>
